--- a/pitch/暖暖-宣傳簡報.pptx
+++ b/pitch/暖暖-宣傳簡報.pptx
@@ -4,6 +4,9 @@
   <p:sldMasterIdLst>
     <p:sldMasterId id="2147483648" r:id="rId1"/>
   </p:sldMasterIdLst>
+  <p:notesMasterIdLst>
+    <p:notesMasterId r:id="rId10"/>
+  </p:notesMasterIdLst>
   <p:sldIdLst>
     <p:sldId id="256" r:id="rId2"/>
     <p:sldId id="257" r:id="rId3"/>
@@ -14,10 +17,7 @@
     <p:sldId id="262" r:id="rId8"/>
     <p:sldId id="263" r:id="rId9"/>
   </p:sldIdLst>
-  <p:notesMasterIdLst>
-    <p:notesMasterId r:id="rId10"/>
-  </p:notesMasterIdLst>
-  <p:sldSz cx="9144000" cy="5143500"/>
+  <p:sldSz cx="9144000" cy="5143500" type="screen16x9"/>
   <p:notesSz cx="5143500" cy="9144000"/>
   <p:defaultTextStyle>
     <a:lvl1pPr marL="0" algn="l" defTabSz="914400" rtl="0" eaLnBrk="1" latinLnBrk="0" hangingPunct="1">
@@ -111,6 +111,11 @@
       </a:defRPr>
     </a:lvl9pPr>
   </p:defaultTextStyle>
+  <p:extLst>
+    <p:ext uri="{EFAFB233-063F-42B5-8137-9DF3F51BA10A}">
+      <p15:sldGuideLst xmlns:p15="http://schemas.microsoft.com/office/powerpoint/2012/main"/>
+    </p:ext>
+  </p:extLst>
 </p:presentation>
 </file>
 
@@ -136,234 +141,10 @@
           <a:chExt cx="0" cy="0"/>
         </a:xfrm>
       </p:grpSpPr>
-      <p:sp>
-        <p:nvSpPr>
-          <p:cNvPr id="2" name="Header Placeholder 1"/>
-          <p:cNvSpPr>
-            <a:spLocks noGrp="1"/>
-          </p:cNvSpPr>
-          <p:nvPr>
-            <p:ph type="hdr" sz="quarter"/>
-          </p:nvPr>
-        </p:nvSpPr>
-        <p:spPr>
-          <a:xfrm>
-            <a:off x="0" y="0"/>
-            <a:ext cx="2971800" cy="458788"/>
-          </a:xfrm>
-          <a:prstGeom prst="rect">
-            <a:avLst/>
-          </a:prstGeom>
-        </p:spPr>
-        <p:txBody>
-          <a:bodyPr vert="horz" lIns="91440" tIns="45720" rIns="91440" bIns="45720" rtlCol="0"/>
-          <a:lstStyle>
-            <a:lvl1pPr algn="l">
-              <a:defRPr sz="1200"/>
-            </a:lvl1pPr>
-          </a:lstStyle>
-          <a:p>
-            <a:endParaRPr lang="en-US"/>
-          </a:p>
-        </p:txBody>
-      </p:sp>
-      <p:sp>
-        <p:nvSpPr>
-          <p:cNvPr id="3" name="Date Placeholder 2"/>
-          <p:cNvSpPr>
-            <a:spLocks noGrp="1"/>
-          </p:cNvSpPr>
-          <p:nvPr>
-            <p:ph type="dt" idx="1"/>
-          </p:nvPr>
-        </p:nvSpPr>
-        <p:spPr>
-          <a:xfrm>
-            <a:off x="3884613" y="0"/>
-            <a:ext cx="2971800" cy="458788"/>
-          </a:xfrm>
-          <a:prstGeom prst="rect">
-            <a:avLst/>
-          </a:prstGeom>
-        </p:spPr>
-        <p:txBody>
-          <a:bodyPr vert="horz" lIns="91440" tIns="45720" rIns="91440" bIns="45720" rtlCol="0"/>
-          <a:lstStyle>
-            <a:lvl1pPr algn="r">
-              <a:defRPr sz="1200"/>
-            </a:lvl1pPr>
-          </a:lstStyle>
-          <a:p>
-            <a:fld id="{5282F153-3F37-0F45-9E97-73ACFA13230C}" type="datetimeFigureOut">
-              <a:rPr lang="en-US"/>
-              <a:t>7/23/19</a:t>
-            </a:fld>
-            <a:endParaRPr lang="en-US"/>
-          </a:p>
-        </p:txBody>
-      </p:sp>
-      <p:sp>
-        <p:nvSpPr>
-          <p:cNvPr id="4" name="Slide Image Placeholder 3"/>
-          <p:cNvSpPr>
-            <a:spLocks noGrp="1" noRot="1" noChangeAspect="1"/>
-          </p:cNvSpPr>
-          <p:nvPr>
-            <p:ph type="sldImg" idx="2"/>
-          </p:nvPr>
-        </p:nvSpPr>
-        <p:spPr>
-          <a:xfrm>
-            <a:off x="685800" y="1143000"/>
-            <a:ext cx="5486400" cy="3086100"/>
-          </a:xfrm>
-          <a:prstGeom prst="rect">
-            <a:avLst/>
-          </a:prstGeom>
-          <a:noFill/>
-          <a:ln w="12700">
-            <a:solidFill>
-              <a:prstClr val="black"/>
-            </a:solidFill>
-          </a:ln>
-        </p:spPr>
-        <p:txBody>
-          <a:bodyPr vert="horz" lIns="91440" tIns="45720" rIns="91440" bIns="45720" rtlCol="0" anchor="ctr"/>
-          <a:lstStyle/>
-          <a:p>
-            <a:endParaRPr lang="en-US"/>
-          </a:p>
-        </p:txBody>
-      </p:sp>
-      <p:sp>
-        <p:nvSpPr>
-          <p:cNvPr id="5" name="Notes Placeholder 4"/>
-          <p:cNvSpPr>
-            <a:spLocks noGrp="1"/>
-          </p:cNvSpPr>
-          <p:nvPr>
-            <p:ph type="body" sz="quarter" idx="3"/>
-          </p:nvPr>
-        </p:nvSpPr>
-        <p:spPr>
-          <a:xfrm>
-            <a:off x="685800" y="4400550"/>
-            <a:ext cx="5486400" cy="3600450"/>
-          </a:xfrm>
-          <a:prstGeom prst="rect">
-            <a:avLst/>
-          </a:prstGeom>
-        </p:spPr>
-        <p:txBody>
-          <a:bodyPr vert="horz" lIns="91440" tIns="45720" rIns="91440" bIns="45720" rtlCol="0"/>
-          <a:lstStyle/>
-          <a:p>
-            <a:pPr lvl="0"/>
-            <a:r>
-              <a:rPr lang="en-US"/>
-              <a:t>Click to edit Master text styles</a:t>
-            </a:r>
-          </a:p>
-          <a:p>
-            <a:pPr lvl="1"/>
-            <a:r>
-              <a:rPr lang="en-US"/>
-              <a:t>Second level</a:t>
-            </a:r>
-          </a:p>
-          <a:p>
-            <a:pPr lvl="2"/>
-            <a:r>
-              <a:rPr lang="en-US"/>
-              <a:t>Third level</a:t>
-            </a:r>
-          </a:p>
-          <a:p>
-            <a:pPr lvl="3"/>
-            <a:r>
-              <a:rPr lang="en-US"/>
-              <a:t>Fourth level</a:t>
-            </a:r>
-          </a:p>
-          <a:p>
-            <a:pPr lvl="4"/>
-            <a:r>
-              <a:rPr lang="en-US"/>
-              <a:t>Fifth level</a:t>
-            </a:r>
-          </a:p>
-        </p:txBody>
-      </p:sp>
-      <p:sp>
-        <p:nvSpPr>
-          <p:cNvPr id="6" name="Footer Placeholder 5"/>
-          <p:cNvSpPr>
-            <a:spLocks noGrp="1"/>
-          </p:cNvSpPr>
-          <p:nvPr>
-            <p:ph type="ftr" sz="quarter" idx="4"/>
-          </p:nvPr>
-        </p:nvSpPr>
-        <p:spPr>
-          <a:xfrm>
-            <a:off x="0" y="8685213"/>
-            <a:ext cx="2971800" cy="458787"/>
-          </a:xfrm>
-          <a:prstGeom prst="rect">
-            <a:avLst/>
-          </a:prstGeom>
-        </p:spPr>
-        <p:txBody>
-          <a:bodyPr vert="horz" lIns="91440" tIns="45720" rIns="91440" bIns="45720" rtlCol="0" anchor="b"/>
-          <a:lstStyle>
-            <a:lvl1pPr algn="l">
-              <a:defRPr sz="1200"/>
-            </a:lvl1pPr>
-          </a:lstStyle>
-          <a:p>
-            <a:endParaRPr lang="en-US"/>
-          </a:p>
-        </p:txBody>
-      </p:sp>
-      <p:sp>
-        <p:nvSpPr>
-          <p:cNvPr id="7" name="Slide Number Placeholder 6"/>
-          <p:cNvSpPr>
-            <a:spLocks noGrp="1"/>
-          </p:cNvSpPr>
-          <p:nvPr>
-            <p:ph type="sldNum" sz="quarter" idx="5"/>
-          </p:nvPr>
-        </p:nvSpPr>
-        <p:spPr>
-          <a:xfrm>
-            <a:off x="3884613" y="8685213"/>
-            <a:ext cx="2971800" cy="458787"/>
-          </a:xfrm>
-          <a:prstGeom prst="rect">
-            <a:avLst/>
-          </a:prstGeom>
-        </p:spPr>
-        <p:txBody>
-          <a:bodyPr vert="horz" lIns="91440" tIns="45720" rIns="91440" bIns="45720" rtlCol="0" anchor="b"/>
-          <a:lstStyle>
-            <a:lvl1pPr algn="r">
-              <a:defRPr sz="1200"/>
-            </a:lvl1pPr>
-          </a:lstStyle>
-          <a:p>
-            <a:fld id="{CE5E9CC1-C706-0F49-92D6-E571CC5EEA8F}" type="slidenum">
-              <a:rPr lang="en-US"/>
-              <a:t>‹#›</a:t>
-            </a:fld>
-            <a:endParaRPr lang="en-US"/>
-          </a:p>
-        </p:txBody>
-      </p:sp>
     </p:spTree>
     <p:extLst>
       <p:ext uri="{BB962C8B-B14F-4D97-AF65-F5344CB8AC3E}">
-        <p14:creationId xmlns:p14="http://schemas.microsoft.com/office/powerpoint/2010/main" val="1024086991"/>
+        <p14:creationId xmlns:p14="http://schemas.microsoft.com/office/powerpoint/2010/main" val="628911913"/>
       </p:ext>
     </p:extLst>
   </p:cSld>
@@ -507,10 +288,6 @@
           <a:bodyPr/>
           <a:lstStyle/>
           <a:p>
-            <a:r>
-              <a:rPr lang="en-US" dirty="0"/>
-              <a:t/>
-            </a:r>
             <a:endParaRPr lang="en-US" dirty="0"/>
           </a:p>
         </p:txBody>
@@ -595,10 +372,6 @@
           <a:bodyPr/>
           <a:lstStyle/>
           <a:p>
-            <a:r>
-              <a:rPr lang="en-US" dirty="0"/>
-              <a:t/>
-            </a:r>
             <a:endParaRPr lang="en-US" dirty="0"/>
           </a:p>
         </p:txBody>
@@ -683,10 +456,6 @@
           <a:bodyPr/>
           <a:lstStyle/>
           <a:p>
-            <a:r>
-              <a:rPr lang="en-US" dirty="0"/>
-              <a:t/>
-            </a:r>
             <a:endParaRPr lang="en-US" dirty="0"/>
           </a:p>
         </p:txBody>
@@ -771,10 +540,6 @@
           <a:bodyPr/>
           <a:lstStyle/>
           <a:p>
-            <a:r>
-              <a:rPr lang="en-US" dirty="0"/>
-              <a:t/>
-            </a:r>
             <a:endParaRPr lang="en-US" dirty="0"/>
           </a:p>
         </p:txBody>
@@ -859,10 +624,6 @@
           <a:bodyPr/>
           <a:lstStyle/>
           <a:p>
-            <a:r>
-              <a:rPr lang="en-US" dirty="0"/>
-              <a:t/>
-            </a:r>
             <a:endParaRPr lang="en-US" dirty="0"/>
           </a:p>
         </p:txBody>
@@ -947,10 +708,6 @@
           <a:bodyPr/>
           <a:lstStyle/>
           <a:p>
-            <a:r>
-              <a:rPr lang="en-US" dirty="0"/>
-              <a:t/>
-            </a:r>
             <a:endParaRPr lang="en-US" dirty="0"/>
           </a:p>
         </p:txBody>
@@ -1035,10 +792,6 @@
           <a:bodyPr/>
           <a:lstStyle/>
           <a:p>
-            <a:r>
-              <a:rPr lang="en-US" dirty="0"/>
-              <a:t/>
-            </a:r>
             <a:endParaRPr lang="en-US" dirty="0"/>
           </a:p>
         </p:txBody>
@@ -1123,10 +876,6 @@
           <a:bodyPr/>
           <a:lstStyle/>
           <a:p>
-            <a:r>
-              <a:rPr lang="en-US" dirty="0"/>
-              <a:t/>
-            </a:r>
             <a:endParaRPr lang="en-US" dirty="0"/>
           </a:p>
         </p:txBody>
@@ -1200,6 +949,11 @@
 <file path=ppt/slideMasters/slideMaster1.xml><?xml version="1.0" encoding="utf-8"?>
 <p:sldMaster xmlns:a="http://schemas.openxmlformats.org/drawingml/2006/main" xmlns:r="http://schemas.openxmlformats.org/officeDocument/2006/relationships" xmlns:p="http://schemas.openxmlformats.org/presentationml/2006/main">
   <p:cSld>
+    <p:bg>
+      <p:bgRef idx="1001">
+        <a:schemeClr val="bg1"/>
+      </p:bgRef>
+    </p:bg>
     <p:spTree>
       <p:nvGrpSpPr>
         <p:cNvPr id="1" name=""/>
@@ -1482,6 +1236,7 @@
         <a:solidFill>
           <a:srgbClr val="FAF5EC"/>
         </a:solidFill>
+        <a:effectLst/>
       </p:bgPr>
     </p:bg>
     <p:spTree>
@@ -1521,6 +1276,13 @@
             <a:prstDash val="solid"/>
           </a:ln>
         </p:spPr>
+        <p:txBody>
+          <a:bodyPr/>
+          <a:lstStyle/>
+          <a:p>
+            <a:endParaRPr lang="zh-TW" altLang="en-US"/>
+          </a:p>
+        </p:txBody>
       </p:sp>
       <p:sp>
         <p:nvSpPr>
@@ -1545,6 +1307,13 @@
             <a:prstDash val="solid"/>
           </a:ln>
         </p:spPr>
+        <p:txBody>
+          <a:bodyPr/>
+          <a:lstStyle/>
+          <a:p>
+            <a:endParaRPr lang="zh-TW" altLang="en-US"/>
+          </a:p>
+        </p:txBody>
       </p:sp>
       <p:sp>
         <p:nvSpPr>
@@ -1569,6 +1338,13 @@
             <a:prstDash val="solid"/>
           </a:ln>
         </p:spPr>
+        <p:txBody>
+          <a:bodyPr/>
+          <a:lstStyle/>
+          <a:p>
+            <a:endParaRPr lang="zh-TW" altLang="en-US"/>
+          </a:p>
+        </p:txBody>
       </p:sp>
       <p:sp>
         <p:nvSpPr>
@@ -1593,6 +1369,13 @@
             <a:prstDash val="solid"/>
           </a:ln>
         </p:spPr>
+        <p:txBody>
+          <a:bodyPr/>
+          <a:lstStyle/>
+          <a:p>
+            <a:endParaRPr lang="zh-TW" altLang="en-US"/>
+          </a:p>
+        </p:txBody>
       </p:sp>
       <p:sp>
         <p:nvSpPr>
@@ -1617,6 +1400,13 @@
             <a:prstDash val="solid"/>
           </a:ln>
         </p:spPr>
+        <p:txBody>
+          <a:bodyPr/>
+          <a:lstStyle/>
+          <a:p>
+            <a:endParaRPr lang="zh-TW" altLang="en-US"/>
+          </a:p>
+        </p:txBody>
       </p:sp>
       <p:sp>
         <p:nvSpPr>
@@ -1641,17 +1431,24 @@
             <a:prstDash val="solid"/>
           </a:ln>
         </p:spPr>
+        <p:txBody>
+          <a:bodyPr/>
+          <a:lstStyle/>
+          <a:p>
+            <a:endParaRPr lang="zh-TW" altLang="en-US"/>
+          </a:p>
+        </p:txBody>
       </p:sp>
       <p:pic>
         <p:nvPicPr>
-          <p:cNvPr id="8" name="Image 0" descr="/Users/hanschung/Desktop/55/public/icon-maskable-512.png">    </p:cNvPr>
+          <p:cNvPr id="8" name="Image 0" descr="/Users/hanschung/Desktop/55/public/icon-maskable-512.png"/>
           <p:cNvPicPr>
             <a:picLocks noChangeAspect="1"/>
           </p:cNvPicPr>
           <p:nvPr/>
         </p:nvPicPr>
         <p:blipFill>
-          <a:blip r:embed="rId1"/>
+          <a:blip r:embed="rId3"/>
           <a:stretch>
             <a:fillRect/>
           </a:stretch>
@@ -1687,11 +1484,11 @@
           <a:bodyPr wrap="square" lIns="0" tIns="0" rIns="0" bIns="0" rtlCol="0" anchor="ctr"/>
           <a:lstStyle/>
           <a:p>
-            <a:pPr algn="ctr" indent="0" marL="0">
-              <a:buNone/>
-            </a:pPr>
-            <a:r>
-              <a:rPr lang="en-US" sz="6400" spc="2000" kern="0" dirty="0">
+            <a:pPr marL="0" indent="0" algn="ctr">
+              <a:buNone/>
+            </a:pPr>
+            <a:r>
+              <a:rPr lang="en-US" sz="6400" kern="0" spc="2000" dirty="0">
                 <a:solidFill>
                   <a:srgbClr val="C95E36"/>
                 </a:solidFill>
@@ -1726,11 +1523,11 @@
           <a:bodyPr wrap="square" lIns="0" tIns="0" rIns="0" bIns="0" rtlCol="0" anchor="ctr"/>
           <a:lstStyle/>
           <a:p>
-            <a:pPr algn="ctr" indent="0" marL="0">
-              <a:buNone/>
-            </a:pPr>
-            <a:r>
-              <a:rPr lang="en-US" sz="1300" spc="600" kern="0" dirty="0">
+            <a:pPr marL="0" indent="0" algn="ctr">
+              <a:buNone/>
+            </a:pPr>
+            <a:r>
+              <a:rPr lang="en-US" sz="1300" kern="0" spc="600" dirty="0">
                 <a:solidFill>
                   <a:srgbClr val="A89580"/>
                 </a:solidFill>
@@ -1765,7 +1562,7 @@
           <a:bodyPr wrap="square" lIns="0" tIns="0" rIns="0" bIns="0" rtlCol="0" anchor="ctr"/>
           <a:lstStyle/>
           <a:p>
-            <a:pPr algn="ctr" indent="0" marL="0">
+            <a:pPr marL="0" indent="0" algn="ctr">
               <a:buNone/>
             </a:pPr>
             <a:r>
@@ -1777,7 +1574,29 @@
                 <a:ea typeface="PingFang TC" pitchFamily="34" charset="-122"/>
                 <a:cs typeface="PingFang TC" pitchFamily="34" charset="-120"/>
               </a:rPr>
-              <a:t>陪 55+ 健康變老的 AI 管家</a:t>
+              <a:t>陪 55+ </a:t>
+            </a:r>
+            <a:r>
+              <a:rPr lang="en-US" sz="2000" dirty="0" err="1">
+                <a:solidFill>
+                  <a:srgbClr val="6B5848"/>
+                </a:solidFill>
+                <a:latin typeface="PingFang TC" pitchFamily="34" charset="0"/>
+                <a:ea typeface="PingFang TC" pitchFamily="34" charset="-122"/>
+                <a:cs typeface="PingFang TC" pitchFamily="34" charset="-120"/>
+              </a:rPr>
+              <a:t>健康陪伴的</a:t>
+            </a:r>
+            <a:r>
+              <a:rPr lang="en-US" sz="2000" dirty="0">
+                <a:solidFill>
+                  <a:srgbClr val="6B5848"/>
+                </a:solidFill>
+                <a:latin typeface="PingFang TC" pitchFamily="34" charset="0"/>
+                <a:ea typeface="PingFang TC" pitchFamily="34" charset="-122"/>
+                <a:cs typeface="PingFang TC" pitchFamily="34" charset="-120"/>
+              </a:rPr>
+              <a:t> AI 管家</a:t>
             </a:r>
             <a:endParaRPr lang="en-US" sz="2000" dirty="0"/>
           </a:p>
@@ -1804,11 +1623,11 @@
           <a:bodyPr wrap="square" lIns="0" tIns="0" rIns="0" bIns="0" rtlCol="0" anchor="ctr"/>
           <a:lstStyle/>
           <a:p>
-            <a:pPr algn="ctr" indent="0" marL="0">
-              <a:buNone/>
-            </a:pPr>
-            <a:r>
-              <a:rPr lang="en-US" sz="1300" b="1" spc="200" kern="0" dirty="0">
+            <a:pPr marL="0" indent="0" algn="ctr">
+              <a:buNone/>
+            </a:pPr>
+            <a:r>
+              <a:rPr lang="en-US" sz="1300" b="1" kern="0" spc="200" dirty="0">
                 <a:solidFill>
                   <a:srgbClr val="E8845A"/>
                 </a:solidFill>
@@ -1838,6 +1657,7 @@
         <a:solidFill>
           <a:srgbClr val="FAF5EC"/>
         </a:solidFill>
+        <a:effectLst/>
       </p:bgPr>
     </p:bg>
     <p:spTree>
@@ -1875,11 +1695,11 @@
           <a:bodyPr wrap="square" lIns="0" tIns="0" rIns="0" bIns="0" rtlCol="0" anchor="ctr"/>
           <a:lstStyle/>
           <a:p>
-            <a:pPr indent="0" marL="0">
-              <a:buNone/>
-            </a:pPr>
-            <a:r>
-              <a:rPr lang="en-US" sz="1100" b="1" spc="400" kern="0" dirty="0">
+            <a:pPr marL="0" indent="0">
+              <a:buNone/>
+            </a:pPr>
+            <a:r>
+              <a:rPr lang="en-US" sz="1100" b="1" kern="0" spc="400" dirty="0">
                 <a:solidFill>
                   <a:srgbClr val="C95E36"/>
                 </a:solidFill>
@@ -1914,7 +1734,7 @@
           <a:bodyPr wrap="square" lIns="0" tIns="0" rIns="0" bIns="0" rtlCol="0" anchor="ctr"/>
           <a:lstStyle/>
           <a:p>
-            <a:pPr indent="0" marL="0">
+            <a:pPr marL="0" indent="0">
               <a:buNone/>
             </a:pPr>
             <a:r>
@@ -1958,13 +1778,20 @@
             <a:prstDash val="solid"/>
           </a:ln>
           <a:effectLst>
-            <a:outerShdw sx="100000" sy="100000" kx="0" ky="0" algn="bl" rotWithShape="0" blurRad="101600" dist="25400" dir="5400000">
+            <a:outerShdw blurRad="101600" dist="25400" dir="5400000" algn="bl" rotWithShape="0">
               <a:srgbClr val="000000">
                 <a:alpha val="6000"/>
               </a:srgbClr>
             </a:outerShdw>
           </a:effectLst>
         </p:spPr>
+        <p:txBody>
+          <a:bodyPr/>
+          <a:lstStyle/>
+          <a:p>
+            <a:endParaRPr lang="zh-TW" altLang="en-US"/>
+          </a:p>
+        </p:txBody>
       </p:sp>
       <p:sp>
         <p:nvSpPr>
@@ -1987,7 +1814,7 @@
           <a:bodyPr wrap="square" lIns="0" tIns="0" rIns="0" bIns="0" rtlCol="0" anchor="ctr"/>
           <a:lstStyle/>
           <a:p>
-            <a:pPr algn="ctr" indent="0" marL="0">
+            <a:pPr marL="0" indent="0" algn="ctr">
               <a:buNone/>
             </a:pPr>
             <a:r>
@@ -2023,7 +1850,7 @@
           <a:bodyPr wrap="square" lIns="0" tIns="0" rIns="0" bIns="0" rtlCol="0" anchor="ctr"/>
           <a:lstStyle/>
           <a:p>
-            <a:pPr algn="ctr" indent="0" marL="0">
+            <a:pPr marL="0" indent="0" algn="ctr">
               <a:buNone/>
             </a:pPr>
             <a:r>
@@ -2062,7 +1889,7 @@
           <a:bodyPr wrap="square" lIns="0" tIns="0" rIns="0" bIns="0" rtlCol="0" anchor="ctr"/>
           <a:lstStyle/>
           <a:p>
-            <a:pPr algn="ctr" indent="0" marL="0">
+            <a:pPr marL="0" indent="0" algn="ctr">
               <a:buNone/>
             </a:pPr>
             <a:r>
@@ -2101,7 +1928,7 @@
           <a:bodyPr wrap="square" lIns="0" tIns="0" rIns="0" bIns="0" rtlCol="0" anchor="ctr"/>
           <a:lstStyle/>
           <a:p>
-            <a:pPr algn="ctr" indent="0" marL="0">
+            <a:pPr marL="0" indent="0" algn="ctr">
               <a:buNone/>
             </a:pPr>
             <a:r>
@@ -2145,13 +1972,20 @@
             <a:prstDash val="solid"/>
           </a:ln>
           <a:effectLst>
-            <a:outerShdw sx="100000" sy="100000" kx="0" ky="0" algn="bl" rotWithShape="0" blurRad="101600" dist="25400" dir="5400000">
+            <a:outerShdw blurRad="101600" dist="25400" dir="5400000" algn="bl" rotWithShape="0">
               <a:srgbClr val="000000">
                 <a:alpha val="6000"/>
               </a:srgbClr>
             </a:outerShdw>
           </a:effectLst>
         </p:spPr>
+        <p:txBody>
+          <a:bodyPr/>
+          <a:lstStyle/>
+          <a:p>
+            <a:endParaRPr lang="zh-TW" altLang="en-US"/>
+          </a:p>
+        </p:txBody>
       </p:sp>
       <p:sp>
         <p:nvSpPr>
@@ -2174,7 +2008,7 @@
           <a:bodyPr wrap="square" lIns="0" tIns="0" rIns="0" bIns="0" rtlCol="0" anchor="ctr"/>
           <a:lstStyle/>
           <a:p>
-            <a:pPr algn="ctr" indent="0" marL="0">
+            <a:pPr marL="0" indent="0" algn="ctr">
               <a:buNone/>
             </a:pPr>
             <a:r>
@@ -2210,7 +2044,7 @@
           <a:bodyPr wrap="square" lIns="0" tIns="0" rIns="0" bIns="0" rtlCol="0" anchor="ctr"/>
           <a:lstStyle/>
           <a:p>
-            <a:pPr algn="ctr" indent="0" marL="0">
+            <a:pPr marL="0" indent="0" algn="ctr">
               <a:buNone/>
             </a:pPr>
             <a:r>
@@ -2249,7 +2083,7 @@
           <a:bodyPr wrap="square" lIns="0" tIns="0" rIns="0" bIns="0" rtlCol="0" anchor="ctr"/>
           <a:lstStyle/>
           <a:p>
-            <a:pPr algn="ctr" indent="0" marL="0">
+            <a:pPr marL="0" indent="0" algn="ctr">
               <a:buNone/>
             </a:pPr>
             <a:r>
@@ -2288,7 +2122,7 @@
           <a:bodyPr wrap="square" lIns="0" tIns="0" rIns="0" bIns="0" rtlCol="0" anchor="ctr"/>
           <a:lstStyle/>
           <a:p>
-            <a:pPr algn="ctr" indent="0" marL="0">
+            <a:pPr marL="0" indent="0" algn="ctr">
               <a:buNone/>
             </a:pPr>
             <a:r>
@@ -2332,13 +2166,20 @@
             <a:prstDash val="solid"/>
           </a:ln>
           <a:effectLst>
-            <a:outerShdw sx="100000" sy="100000" kx="0" ky="0" algn="bl" rotWithShape="0" blurRad="101600" dist="25400" dir="5400000">
+            <a:outerShdw blurRad="101600" dist="25400" dir="5400000" algn="bl" rotWithShape="0">
               <a:srgbClr val="000000">
                 <a:alpha val="6000"/>
               </a:srgbClr>
             </a:outerShdw>
           </a:effectLst>
         </p:spPr>
+        <p:txBody>
+          <a:bodyPr/>
+          <a:lstStyle/>
+          <a:p>
+            <a:endParaRPr lang="zh-TW" altLang="en-US"/>
+          </a:p>
+        </p:txBody>
       </p:sp>
       <p:sp>
         <p:nvSpPr>
@@ -2361,7 +2202,7 @@
           <a:bodyPr wrap="square" lIns="0" tIns="0" rIns="0" bIns="0" rtlCol="0" anchor="ctr"/>
           <a:lstStyle/>
           <a:p>
-            <a:pPr algn="ctr" indent="0" marL="0">
+            <a:pPr marL="0" indent="0" algn="ctr">
               <a:buNone/>
             </a:pPr>
             <a:r>
@@ -2397,7 +2238,7 @@
           <a:bodyPr wrap="square" lIns="0" tIns="0" rIns="0" bIns="0" rtlCol="0" anchor="ctr"/>
           <a:lstStyle/>
           <a:p>
-            <a:pPr algn="ctr" indent="0" marL="0">
+            <a:pPr marL="0" indent="0" algn="ctr">
               <a:buNone/>
             </a:pPr>
             <a:r>
@@ -2436,7 +2277,7 @@
           <a:bodyPr wrap="square" lIns="0" tIns="0" rIns="0" bIns="0" rtlCol="0" anchor="ctr"/>
           <a:lstStyle/>
           <a:p>
-            <a:pPr algn="ctr" indent="0" marL="0">
+            <a:pPr marL="0" indent="0" algn="ctr">
               <a:buNone/>
             </a:pPr>
             <a:r>
@@ -2475,7 +2316,7 @@
           <a:bodyPr wrap="square" lIns="0" tIns="0" rIns="0" bIns="0" rtlCol="0" anchor="ctr"/>
           <a:lstStyle/>
           <a:p>
-            <a:pPr algn="ctr" indent="0" marL="0">
+            <a:pPr marL="0" indent="0" algn="ctr">
               <a:buNone/>
             </a:pPr>
             <a:r>
@@ -2519,6 +2360,13 @@
             <a:prstDash val="solid"/>
           </a:ln>
         </p:spPr>
+        <p:txBody>
+          <a:bodyPr/>
+          <a:lstStyle/>
+          <a:p>
+            <a:endParaRPr lang="zh-TW" altLang="en-US"/>
+          </a:p>
+        </p:txBody>
       </p:sp>
       <p:sp>
         <p:nvSpPr>
@@ -2541,7 +2389,7 @@
           <a:bodyPr wrap="square" lIns="0" tIns="0" rIns="0" bIns="0" rtlCol="0" anchor="ctr"/>
           <a:lstStyle/>
           <a:p>
-            <a:pPr algn="ctr" indent="0" marL="0">
+            <a:pPr marL="0" indent="0" algn="ctr">
               <a:buNone/>
             </a:pPr>
             <a:r>
@@ -2580,7 +2428,7 @@
           <a:bodyPr wrap="square" lIns="0" tIns="0" rIns="0" bIns="0" rtlCol="0" anchor="ctr"/>
           <a:lstStyle/>
           <a:p>
-            <a:pPr algn="r" indent="0" marL="0">
+            <a:pPr marL="0" indent="0" algn="r">
               <a:buNone/>
             </a:pPr>
             <a:r>
@@ -2614,6 +2462,7 @@
         <a:solidFill>
           <a:srgbClr val="FAF5EC"/>
         </a:solidFill>
+        <a:effectLst/>
       </p:bgPr>
     </p:bg>
     <p:spTree>
@@ -2653,6 +2502,13 @@
             <a:prstDash val="solid"/>
           </a:ln>
         </p:spPr>
+        <p:txBody>
+          <a:bodyPr/>
+          <a:lstStyle/>
+          <a:p>
+            <a:endParaRPr lang="zh-TW" altLang="en-US"/>
+          </a:p>
+        </p:txBody>
       </p:sp>
       <p:sp>
         <p:nvSpPr>
@@ -2677,6 +2533,13 @@
             <a:prstDash val="solid"/>
           </a:ln>
         </p:spPr>
+        <p:txBody>
+          <a:bodyPr/>
+          <a:lstStyle/>
+          <a:p>
+            <a:endParaRPr lang="zh-TW" altLang="en-US"/>
+          </a:p>
+        </p:txBody>
       </p:sp>
       <p:sp>
         <p:nvSpPr>
@@ -2701,6 +2564,13 @@
             <a:prstDash val="solid"/>
           </a:ln>
         </p:spPr>
+        <p:txBody>
+          <a:bodyPr/>
+          <a:lstStyle/>
+          <a:p>
+            <a:endParaRPr lang="zh-TW" altLang="en-US"/>
+          </a:p>
+        </p:txBody>
       </p:sp>
       <p:sp>
         <p:nvSpPr>
@@ -2725,6 +2595,13 @@
             <a:prstDash val="solid"/>
           </a:ln>
         </p:spPr>
+        <p:txBody>
+          <a:bodyPr/>
+          <a:lstStyle/>
+          <a:p>
+            <a:endParaRPr lang="zh-TW" altLang="en-US"/>
+          </a:p>
+        </p:txBody>
       </p:sp>
       <p:sp>
         <p:nvSpPr>
@@ -2747,11 +2624,11 @@
           <a:bodyPr wrap="square" lIns="0" tIns="0" rIns="0" bIns="0" rtlCol="0" anchor="ctr"/>
           <a:lstStyle/>
           <a:p>
-            <a:pPr indent="0" marL="0">
-              <a:buNone/>
-            </a:pPr>
-            <a:r>
-              <a:rPr lang="en-US" sz="1100" b="1" spc="400" kern="0" dirty="0">
+            <a:pPr marL="0" indent="0">
+              <a:buNone/>
+            </a:pPr>
+            <a:r>
+              <a:rPr lang="en-US" sz="1100" b="1" kern="0" spc="400" dirty="0">
                 <a:solidFill>
                   <a:srgbClr val="C95E36"/>
                 </a:solidFill>
@@ -2786,7 +2663,7 @@
           <a:bodyPr wrap="square" lIns="0" tIns="0" rIns="0" bIns="0" rtlCol="0" anchor="ctr"/>
           <a:lstStyle/>
           <a:p>
-            <a:pPr indent="0" marL="0">
+            <a:pPr marL="0" indent="0">
               <a:lnSpc>
                 <a:spcPts val="4400"/>
               </a:lnSpc>
@@ -2806,7 +2683,7 @@
             <a:endParaRPr lang="en-US" sz="3400" dirty="0"/>
           </a:p>
           <a:p>
-            <a:pPr indent="0" marL="0">
+            <a:pPr marL="0" indent="0">
               <a:lnSpc>
                 <a:spcPts val="4400"/>
               </a:lnSpc>
@@ -2848,7 +2725,7 @@
           <a:bodyPr wrap="square" lIns="0" tIns="0" rIns="0" bIns="0" rtlCol="0" anchor="ctr"/>
           <a:lstStyle/>
           <a:p>
-            <a:pPr indent="0" marL="0">
+            <a:pPr marL="0" indent="0">
               <a:lnSpc>
                 <a:spcPts val="2400"/>
               </a:lnSpc>
@@ -2868,7 +2745,7 @@
             <a:endParaRPr lang="en-US" sz="1500" dirty="0"/>
           </a:p>
           <a:p>
-            <a:pPr indent="0" marL="0">
+            <a:pPr marL="0" indent="0">
               <a:lnSpc>
                 <a:spcPts val="2400"/>
               </a:lnSpc>
@@ -2891,14 +2768,14 @@
       </p:sp>
       <p:pic>
         <p:nvPicPr>
-          <p:cNvPr id="9" name="Image 0" descr="/Users/hanschung/Desktop/55/public/icon-maskable-512.png">    </p:cNvPr>
+          <p:cNvPr id="9" name="Image 0" descr="/Users/hanschung/Desktop/55/public/icon-maskable-512.png"/>
           <p:cNvPicPr>
             <a:picLocks noChangeAspect="1"/>
           </p:cNvPicPr>
           <p:nvPr/>
         </p:nvPicPr>
         <p:blipFill>
-          <a:blip r:embed="rId1"/>
+          <a:blip r:embed="rId3"/>
           <a:stretch>
             <a:fillRect/>
           </a:stretch>
@@ -2939,6 +2816,13 @@
             <a:prstDash val="solid"/>
           </a:ln>
         </p:spPr>
+        <p:txBody>
+          <a:bodyPr/>
+          <a:lstStyle/>
+          <a:p>
+            <a:endParaRPr lang="zh-TW" altLang="en-US"/>
+          </a:p>
+        </p:txBody>
       </p:sp>
       <p:sp>
         <p:nvSpPr>
@@ -2961,7 +2845,7 @@
           <a:bodyPr wrap="square" lIns="0" tIns="0" rIns="0" bIns="0" rtlCol="0" anchor="ctr"/>
           <a:lstStyle/>
           <a:p>
-            <a:pPr algn="ctr" indent="0" marL="0">
+            <a:pPr marL="0" indent="0" algn="ctr">
               <a:buNone/>
             </a:pPr>
             <a:r>
@@ -3005,6 +2889,13 @@
             <a:prstDash val="solid"/>
           </a:ln>
         </p:spPr>
+        <p:txBody>
+          <a:bodyPr/>
+          <a:lstStyle/>
+          <a:p>
+            <a:endParaRPr lang="zh-TW" altLang="en-US"/>
+          </a:p>
+        </p:txBody>
       </p:sp>
       <p:sp>
         <p:nvSpPr>
@@ -3027,7 +2918,7 @@
           <a:bodyPr wrap="square" lIns="0" tIns="0" rIns="0" bIns="0" rtlCol="0" anchor="ctr"/>
           <a:lstStyle/>
           <a:p>
-            <a:pPr algn="ctr" indent="0" marL="0">
+            <a:pPr marL="0" indent="0" algn="ctr">
               <a:buNone/>
             </a:pPr>
             <a:r>
@@ -3071,6 +2962,13 @@
             <a:prstDash val="solid"/>
           </a:ln>
         </p:spPr>
+        <p:txBody>
+          <a:bodyPr/>
+          <a:lstStyle/>
+          <a:p>
+            <a:endParaRPr lang="zh-TW" altLang="en-US"/>
+          </a:p>
+        </p:txBody>
       </p:sp>
       <p:sp>
         <p:nvSpPr>
@@ -3093,7 +2991,7 @@
           <a:bodyPr wrap="square" lIns="0" tIns="0" rIns="0" bIns="0" rtlCol="0" anchor="ctr"/>
           <a:lstStyle/>
           <a:p>
-            <a:pPr algn="ctr" indent="0" marL="0">
+            <a:pPr marL="0" indent="0" algn="ctr">
               <a:buNone/>
             </a:pPr>
             <a:r>
@@ -3119,7 +3017,7 @@
         </p:nvSpPr>
         <p:spPr>
           <a:xfrm>
-            <a:off x="5760720" y="3794760"/>
+            <a:off x="6120484" y="3794760"/>
             <a:ext cx="1865376" cy="438912"/>
           </a:xfrm>
           <a:prstGeom prst="roundRect">
@@ -3137,6 +3035,13 @@
             <a:prstDash val="solid"/>
           </a:ln>
         </p:spPr>
+        <p:txBody>
+          <a:bodyPr/>
+          <a:lstStyle/>
+          <a:p>
+            <a:endParaRPr lang="zh-TW" altLang="en-US"/>
+          </a:p>
+        </p:txBody>
       </p:sp>
       <p:sp>
         <p:nvSpPr>
@@ -3146,7 +3051,7 @@
         </p:nvSpPr>
         <p:spPr>
           <a:xfrm>
-            <a:off x="5760720" y="3794760"/>
+            <a:off x="6120484" y="3794760"/>
             <a:ext cx="1865376" cy="438912"/>
           </a:xfrm>
           <a:prstGeom prst="rect">
@@ -3159,7 +3064,7 @@
           <a:bodyPr wrap="square" lIns="0" tIns="0" rIns="0" bIns="0" rtlCol="0" anchor="ctr"/>
           <a:lstStyle/>
           <a:p>
-            <a:pPr algn="ctr" indent="0" marL="0">
+            <a:pPr marL="0" indent="0" algn="ctr">
               <a:buNone/>
             </a:pPr>
             <a:r>
@@ -3198,7 +3103,7 @@
           <a:bodyPr wrap="square" lIns="0" tIns="0" rIns="0" bIns="0" rtlCol="0" anchor="ctr"/>
           <a:lstStyle/>
           <a:p>
-            <a:pPr indent="0" marL="0">
+            <a:pPr marL="0" indent="0">
               <a:buNone/>
             </a:pPr>
             <a:r>
@@ -3237,7 +3142,7 @@
           <a:bodyPr wrap="square" lIns="0" tIns="0" rIns="0" bIns="0" rtlCol="0" anchor="ctr"/>
           <a:lstStyle/>
           <a:p>
-            <a:pPr algn="r" indent="0" marL="0">
+            <a:pPr marL="0" indent="0" algn="r">
               <a:buNone/>
             </a:pPr>
             <a:r>
@@ -3271,6 +3176,7 @@
         <a:solidFill>
           <a:srgbClr val="FAF5EC"/>
         </a:solidFill>
+        <a:effectLst/>
       </p:bgPr>
     </p:bg>
     <p:spTree>
@@ -3308,11 +3214,11 @@
           <a:bodyPr wrap="square" lIns="0" tIns="0" rIns="0" bIns="0" rtlCol="0" anchor="ctr"/>
           <a:lstStyle/>
           <a:p>
-            <a:pPr indent="0" marL="0">
-              <a:buNone/>
-            </a:pPr>
-            <a:r>
-              <a:rPr lang="en-US" sz="1100" b="1" spc="400" kern="0" dirty="0">
+            <a:pPr marL="0" indent="0">
+              <a:buNone/>
+            </a:pPr>
+            <a:r>
+              <a:rPr lang="en-US" sz="1100" b="1" kern="0" spc="400" dirty="0">
                 <a:solidFill>
                   <a:srgbClr val="C95E36"/>
                 </a:solidFill>
@@ -3347,7 +3253,7 @@
           <a:bodyPr wrap="square" lIns="0" tIns="0" rIns="0" bIns="0" rtlCol="0" anchor="ctr"/>
           <a:lstStyle/>
           <a:p>
-            <a:pPr indent="0" marL="0">
+            <a:pPr marL="0" indent="0">
               <a:buNone/>
             </a:pPr>
             <a:r>
@@ -3391,13 +3297,20 @@
             <a:prstDash val="solid"/>
           </a:ln>
           <a:effectLst>
-            <a:outerShdw sx="100000" sy="100000" kx="0" ky="0" algn="bl" rotWithShape="0" blurRad="101600" dist="25400" dir="5400000">
+            <a:outerShdw blurRad="101600" dist="25400" dir="5400000" algn="bl" rotWithShape="0">
               <a:srgbClr val="000000">
                 <a:alpha val="6000"/>
               </a:srgbClr>
             </a:outerShdw>
           </a:effectLst>
         </p:spPr>
+        <p:txBody>
+          <a:bodyPr/>
+          <a:lstStyle/>
+          <a:p>
+            <a:endParaRPr lang="zh-TW" altLang="en-US"/>
+          </a:p>
+        </p:txBody>
       </p:sp>
       <p:sp>
         <p:nvSpPr>
@@ -3423,6 +3336,13 @@
             <a:prstDash val="solid"/>
           </a:ln>
         </p:spPr>
+        <p:txBody>
+          <a:bodyPr/>
+          <a:lstStyle/>
+          <a:p>
+            <a:endParaRPr lang="zh-TW" altLang="en-US"/>
+          </a:p>
+        </p:txBody>
       </p:sp>
       <p:sp>
         <p:nvSpPr>
@@ -3445,7 +3365,7 @@
           <a:bodyPr wrap="square" lIns="0" tIns="0" rIns="0" bIns="0" rtlCol="0" anchor="ctr"/>
           <a:lstStyle/>
           <a:p>
-            <a:pPr algn="ctr" indent="0" marL="0">
+            <a:pPr marL="0" indent="0" algn="ctr">
               <a:buNone/>
             </a:pPr>
             <a:r>
@@ -3481,7 +3401,7 @@
           <a:bodyPr wrap="square" lIns="0" tIns="0" rIns="0" bIns="0" rtlCol="0" anchor="ctr"/>
           <a:lstStyle/>
           <a:p>
-            <a:pPr algn="ctr" indent="0" marL="0">
+            <a:pPr marL="0" indent="0" algn="ctr">
               <a:buNone/>
             </a:pPr>
             <a:r>
@@ -3520,7 +3440,7 @@
           <a:bodyPr wrap="square" lIns="0" tIns="0" rIns="0" bIns="0" rtlCol="0" anchor="ctr"/>
           <a:lstStyle/>
           <a:p>
-            <a:pPr algn="ctr" indent="0" marL="0">
+            <a:pPr marL="0" indent="0" algn="ctr">
               <a:lnSpc>
                 <a:spcPts val="1700"/>
               </a:lnSpc>
@@ -3567,6 +3487,13 @@
             <a:prstDash val="solid"/>
           </a:ln>
         </p:spPr>
+        <p:txBody>
+          <a:bodyPr/>
+          <a:lstStyle/>
+          <a:p>
+            <a:endParaRPr lang="zh-TW" altLang="en-US"/>
+          </a:p>
+        </p:txBody>
       </p:sp>
       <p:sp>
         <p:nvSpPr>
@@ -3589,7 +3516,7 @@
           <a:bodyPr wrap="square" lIns="0" tIns="0" rIns="0" bIns="0" rtlCol="0" anchor="ctr"/>
           <a:lstStyle/>
           <a:p>
-            <a:pPr algn="ctr" indent="0" marL="0">
+            <a:pPr marL="0" indent="0" algn="ctr">
               <a:buNone/>
             </a:pPr>
             <a:r>
@@ -3633,13 +3560,20 @@
             <a:prstDash val="solid"/>
           </a:ln>
           <a:effectLst>
-            <a:outerShdw sx="100000" sy="100000" kx="0" ky="0" algn="bl" rotWithShape="0" blurRad="101600" dist="25400" dir="5400000">
+            <a:outerShdw blurRad="101600" dist="25400" dir="5400000" algn="bl" rotWithShape="0">
               <a:srgbClr val="000000">
                 <a:alpha val="6000"/>
               </a:srgbClr>
             </a:outerShdw>
           </a:effectLst>
         </p:spPr>
+        <p:txBody>
+          <a:bodyPr/>
+          <a:lstStyle/>
+          <a:p>
+            <a:endParaRPr lang="zh-TW" altLang="en-US"/>
+          </a:p>
+        </p:txBody>
       </p:sp>
       <p:sp>
         <p:nvSpPr>
@@ -3665,6 +3599,13 @@
             <a:prstDash val="solid"/>
           </a:ln>
         </p:spPr>
+        <p:txBody>
+          <a:bodyPr/>
+          <a:lstStyle/>
+          <a:p>
+            <a:endParaRPr lang="zh-TW" altLang="en-US"/>
+          </a:p>
+        </p:txBody>
       </p:sp>
       <p:sp>
         <p:nvSpPr>
@@ -3687,7 +3628,7 @@
           <a:bodyPr wrap="square" lIns="0" tIns="0" rIns="0" bIns="0" rtlCol="0" anchor="ctr"/>
           <a:lstStyle/>
           <a:p>
-            <a:pPr algn="ctr" indent="0" marL="0">
+            <a:pPr marL="0" indent="0" algn="ctr">
               <a:buNone/>
             </a:pPr>
             <a:r>
@@ -3723,7 +3664,7 @@
           <a:bodyPr wrap="square" lIns="0" tIns="0" rIns="0" bIns="0" rtlCol="0" anchor="ctr"/>
           <a:lstStyle/>
           <a:p>
-            <a:pPr algn="ctr" indent="0" marL="0">
+            <a:pPr marL="0" indent="0" algn="ctr">
               <a:buNone/>
             </a:pPr>
             <a:r>
@@ -3762,7 +3703,7 @@
           <a:bodyPr wrap="square" lIns="0" tIns="0" rIns="0" bIns="0" rtlCol="0" anchor="ctr"/>
           <a:lstStyle/>
           <a:p>
-            <a:pPr algn="ctr" indent="0" marL="0">
+            <a:pPr marL="0" indent="0" algn="ctr">
               <a:lnSpc>
                 <a:spcPts val="1700"/>
               </a:lnSpc>
@@ -3809,6 +3750,13 @@
             <a:prstDash val="solid"/>
           </a:ln>
         </p:spPr>
+        <p:txBody>
+          <a:bodyPr/>
+          <a:lstStyle/>
+          <a:p>
+            <a:endParaRPr lang="zh-TW" altLang="en-US"/>
+          </a:p>
+        </p:txBody>
       </p:sp>
       <p:sp>
         <p:nvSpPr>
@@ -3831,7 +3779,7 @@
           <a:bodyPr wrap="square" lIns="0" tIns="0" rIns="0" bIns="0" rtlCol="0" anchor="ctr"/>
           <a:lstStyle/>
           <a:p>
-            <a:pPr algn="ctr" indent="0" marL="0">
+            <a:pPr marL="0" indent="0" algn="ctr">
               <a:buNone/>
             </a:pPr>
             <a:r>
@@ -3875,13 +3823,20 @@
             <a:prstDash val="solid"/>
           </a:ln>
           <a:effectLst>
-            <a:outerShdw sx="100000" sy="100000" kx="0" ky="0" algn="bl" rotWithShape="0" blurRad="101600" dist="25400" dir="5400000">
+            <a:outerShdw blurRad="101600" dist="25400" dir="5400000" algn="bl" rotWithShape="0">
               <a:srgbClr val="000000">
                 <a:alpha val="6000"/>
               </a:srgbClr>
             </a:outerShdw>
           </a:effectLst>
         </p:spPr>
+        <p:txBody>
+          <a:bodyPr/>
+          <a:lstStyle/>
+          <a:p>
+            <a:endParaRPr lang="zh-TW" altLang="en-US"/>
+          </a:p>
+        </p:txBody>
       </p:sp>
       <p:sp>
         <p:nvSpPr>
@@ -3907,6 +3862,13 @@
             <a:prstDash val="solid"/>
           </a:ln>
         </p:spPr>
+        <p:txBody>
+          <a:bodyPr/>
+          <a:lstStyle/>
+          <a:p>
+            <a:endParaRPr lang="zh-TW" altLang="en-US"/>
+          </a:p>
+        </p:txBody>
       </p:sp>
       <p:sp>
         <p:nvSpPr>
@@ -3929,7 +3891,7 @@
           <a:bodyPr wrap="square" lIns="0" tIns="0" rIns="0" bIns="0" rtlCol="0" anchor="ctr"/>
           <a:lstStyle/>
           <a:p>
-            <a:pPr algn="ctr" indent="0" marL="0">
+            <a:pPr marL="0" indent="0" algn="ctr">
               <a:buNone/>
             </a:pPr>
             <a:r>
@@ -3965,7 +3927,7 @@
           <a:bodyPr wrap="square" lIns="0" tIns="0" rIns="0" bIns="0" rtlCol="0" anchor="ctr"/>
           <a:lstStyle/>
           <a:p>
-            <a:pPr algn="ctr" indent="0" marL="0">
+            <a:pPr marL="0" indent="0" algn="ctr">
               <a:buNone/>
             </a:pPr>
             <a:r>
@@ -4004,7 +3966,7 @@
           <a:bodyPr wrap="square" lIns="0" tIns="0" rIns="0" bIns="0" rtlCol="0" anchor="ctr"/>
           <a:lstStyle/>
           <a:p>
-            <a:pPr algn="ctr" indent="0" marL="0">
+            <a:pPr marL="0" indent="0" algn="ctr">
               <a:lnSpc>
                 <a:spcPts val="1700"/>
               </a:lnSpc>
@@ -4051,6 +4013,13 @@
             <a:prstDash val="solid"/>
           </a:ln>
         </p:spPr>
+        <p:txBody>
+          <a:bodyPr/>
+          <a:lstStyle/>
+          <a:p>
+            <a:endParaRPr lang="zh-TW" altLang="en-US"/>
+          </a:p>
+        </p:txBody>
       </p:sp>
       <p:sp>
         <p:nvSpPr>
@@ -4073,7 +4042,7 @@
           <a:bodyPr wrap="square" lIns="0" tIns="0" rIns="0" bIns="0" rtlCol="0" anchor="ctr"/>
           <a:lstStyle/>
           <a:p>
-            <a:pPr algn="ctr" indent="0" marL="0">
+            <a:pPr marL="0" indent="0" algn="ctr">
               <a:buNone/>
             </a:pPr>
             <a:r>
@@ -4112,7 +4081,7 @@
           <a:bodyPr wrap="square" lIns="0" tIns="0" rIns="0" bIns="0" rtlCol="0" anchor="ctr"/>
           <a:lstStyle/>
           <a:p>
-            <a:pPr algn="ctr" indent="0" marL="0">
+            <a:pPr marL="0" indent="0" algn="ctr">
               <a:buNone/>
             </a:pPr>
             <a:r>
@@ -4151,7 +4120,7 @@
           <a:bodyPr wrap="square" lIns="0" tIns="0" rIns="0" bIns="0" rtlCol="0" anchor="ctr"/>
           <a:lstStyle/>
           <a:p>
-            <a:pPr algn="r" indent="0" marL="0">
+            <a:pPr marL="0" indent="0" algn="r">
               <a:buNone/>
             </a:pPr>
             <a:r>
@@ -4185,6 +4154,7 @@
         <a:solidFill>
           <a:srgbClr val="3D2E20"/>
         </a:solidFill>
+        <a:effectLst/>
       </p:bgPr>
     </p:bg>
     <p:spTree>
@@ -4227,6 +4197,13 @@
             <a:prstDash val="solid"/>
           </a:ln>
         </p:spPr>
+        <p:txBody>
+          <a:bodyPr/>
+          <a:lstStyle/>
+          <a:p>
+            <a:endParaRPr lang="zh-TW" altLang="en-US"/>
+          </a:p>
+        </p:txBody>
       </p:sp>
       <p:sp>
         <p:nvSpPr>
@@ -4254,6 +4231,13 @@
             <a:prstDash val="solid"/>
           </a:ln>
         </p:spPr>
+        <p:txBody>
+          <a:bodyPr/>
+          <a:lstStyle/>
+          <a:p>
+            <a:endParaRPr lang="zh-TW" altLang="en-US"/>
+          </a:p>
+        </p:txBody>
       </p:sp>
       <p:sp>
         <p:nvSpPr>
@@ -4276,11 +4260,11 @@
           <a:bodyPr wrap="square" lIns="0" tIns="0" rIns="0" bIns="0" rtlCol="0" anchor="ctr"/>
           <a:lstStyle/>
           <a:p>
-            <a:pPr indent="0" marL="0">
-              <a:buNone/>
-            </a:pPr>
-            <a:r>
-              <a:rPr lang="en-US" sz="1100" b="1" spc="400" kern="0" dirty="0">
+            <a:pPr marL="0" indent="0">
+              <a:buNone/>
+            </a:pPr>
+            <a:r>
+              <a:rPr lang="en-US" sz="1100" b="1" kern="0" spc="400" dirty="0">
                 <a:solidFill>
                   <a:srgbClr val="E8845A"/>
                 </a:solidFill>
@@ -4315,7 +4299,7 @@
           <a:bodyPr wrap="square" lIns="0" tIns="0" rIns="0" bIns="0" rtlCol="0" anchor="ctr"/>
           <a:lstStyle/>
           <a:p>
-            <a:pPr indent="0" marL="0">
+            <a:pPr marL="0" indent="0">
               <a:buNone/>
             </a:pPr>
             <a:r>
@@ -4359,13 +4343,20 @@
             <a:prstDash val="solid"/>
           </a:ln>
           <a:effectLst>
-            <a:outerShdw sx="100000" sy="100000" kx="0" ky="0" algn="bl" rotWithShape="0" blurRad="127000" dist="38100" dir="5400000">
+            <a:outerShdw blurRad="127000" dist="38100" dir="5400000" algn="bl" rotWithShape="0">
               <a:srgbClr val="000000">
                 <a:alpha val="28000"/>
               </a:srgbClr>
             </a:outerShdw>
           </a:effectLst>
         </p:spPr>
+        <p:txBody>
+          <a:bodyPr/>
+          <a:lstStyle/>
+          <a:p>
+            <a:endParaRPr lang="zh-TW" altLang="en-US"/>
+          </a:p>
+        </p:txBody>
       </p:sp>
       <p:sp>
         <p:nvSpPr>
@@ -4388,7 +4379,7 @@
           <a:bodyPr wrap="square" lIns="0" tIns="0" rIns="0" bIns="0" rtlCol="0" anchor="ctr"/>
           <a:lstStyle/>
           <a:p>
-            <a:pPr algn="ctr" indent="0" marL="0">
+            <a:pPr marL="0" indent="0" algn="ctr">
               <a:buNone/>
             </a:pPr>
             <a:r>
@@ -4424,7 +4415,7 @@
           <a:bodyPr wrap="square" lIns="0" tIns="0" rIns="0" bIns="0" rtlCol="0" anchor="ctr"/>
           <a:lstStyle/>
           <a:p>
-            <a:pPr algn="ctr" indent="0" marL="0">
+            <a:pPr marL="0" indent="0" algn="ctr">
               <a:buNone/>
             </a:pPr>
             <a:r>
@@ -4463,7 +4454,7 @@
           <a:bodyPr wrap="square" lIns="0" tIns="0" rIns="0" bIns="0" rtlCol="0" anchor="ctr"/>
           <a:lstStyle/>
           <a:p>
-            <a:pPr algn="ctr" indent="0" marL="0">
+            <a:pPr marL="0" indent="0" algn="ctr">
               <a:lnSpc>
                 <a:spcPts val="1500"/>
               </a:lnSpc>
@@ -4483,7 +4474,7 @@
             <a:endParaRPr lang="en-US" sz="1050" dirty="0"/>
           </a:p>
           <a:p>
-            <a:pPr algn="ctr" indent="0" marL="0">
+            <a:pPr marL="0" indent="0" algn="ctr">
               <a:lnSpc>
                 <a:spcPts val="1500"/>
               </a:lnSpc>
@@ -4525,7 +4516,7 @@
           <a:bodyPr wrap="square" lIns="0" tIns="0" rIns="0" bIns="0" rtlCol="0" anchor="ctr"/>
           <a:lstStyle/>
           <a:p>
-            <a:pPr algn="ctr" indent="0" marL="0">
+            <a:pPr marL="0" indent="0" algn="ctr">
               <a:buNone/>
             </a:pPr>
             <a:r>
@@ -4566,13 +4557,20 @@
             <a:prstDash val="solid"/>
           </a:ln>
           <a:effectLst>
-            <a:outerShdw sx="100000" sy="100000" kx="0" ky="0" algn="bl" rotWithShape="0" blurRad="127000" dist="38100" dir="5400000">
+            <a:outerShdw blurRad="127000" dist="38100" dir="5400000" algn="bl" rotWithShape="0">
               <a:srgbClr val="000000">
                 <a:alpha val="28000"/>
               </a:srgbClr>
             </a:outerShdw>
           </a:effectLst>
         </p:spPr>
+        <p:txBody>
+          <a:bodyPr/>
+          <a:lstStyle/>
+          <a:p>
+            <a:endParaRPr lang="zh-TW" altLang="en-US"/>
+          </a:p>
+        </p:txBody>
       </p:sp>
       <p:sp>
         <p:nvSpPr>
@@ -4595,7 +4593,7 @@
           <a:bodyPr wrap="square" lIns="0" tIns="0" rIns="0" bIns="0" rtlCol="0" anchor="ctr"/>
           <a:lstStyle/>
           <a:p>
-            <a:pPr algn="ctr" indent="0" marL="0">
+            <a:pPr marL="0" indent="0" algn="ctr">
               <a:buNone/>
             </a:pPr>
             <a:r>
@@ -4631,7 +4629,7 @@
           <a:bodyPr wrap="square" lIns="0" tIns="0" rIns="0" bIns="0" rtlCol="0" anchor="ctr"/>
           <a:lstStyle/>
           <a:p>
-            <a:pPr algn="ctr" indent="0" marL="0">
+            <a:pPr marL="0" indent="0" algn="ctr">
               <a:buNone/>
             </a:pPr>
             <a:r>
@@ -4670,7 +4668,7 @@
           <a:bodyPr wrap="square" lIns="0" tIns="0" rIns="0" bIns="0" rtlCol="0" anchor="ctr"/>
           <a:lstStyle/>
           <a:p>
-            <a:pPr algn="ctr" indent="0" marL="0">
+            <a:pPr marL="0" indent="0" algn="ctr">
               <a:lnSpc>
                 <a:spcPts val="1500"/>
               </a:lnSpc>
@@ -4690,7 +4688,7 @@
             <a:endParaRPr lang="en-US" sz="1050" dirty="0"/>
           </a:p>
           <a:p>
-            <a:pPr algn="ctr" indent="0" marL="0">
+            <a:pPr marL="0" indent="0" algn="ctr">
               <a:lnSpc>
                 <a:spcPts val="1500"/>
               </a:lnSpc>
@@ -4732,7 +4730,7 @@
           <a:bodyPr wrap="square" lIns="0" tIns="0" rIns="0" bIns="0" rtlCol="0" anchor="ctr"/>
           <a:lstStyle/>
           <a:p>
-            <a:pPr algn="ctr" indent="0" marL="0">
+            <a:pPr marL="0" indent="0" algn="ctr">
               <a:buNone/>
             </a:pPr>
             <a:r>
@@ -4773,13 +4771,20 @@
             <a:prstDash val="solid"/>
           </a:ln>
           <a:effectLst>
-            <a:outerShdw sx="100000" sy="100000" kx="0" ky="0" algn="bl" rotWithShape="0" blurRad="127000" dist="38100" dir="5400000">
+            <a:outerShdw blurRad="127000" dist="38100" dir="5400000" algn="bl" rotWithShape="0">
               <a:srgbClr val="000000">
                 <a:alpha val="28000"/>
               </a:srgbClr>
             </a:outerShdw>
           </a:effectLst>
         </p:spPr>
+        <p:txBody>
+          <a:bodyPr/>
+          <a:lstStyle/>
+          <a:p>
+            <a:endParaRPr lang="zh-TW" altLang="en-US"/>
+          </a:p>
+        </p:txBody>
       </p:sp>
       <p:sp>
         <p:nvSpPr>
@@ -4802,7 +4807,7 @@
           <a:bodyPr wrap="square" lIns="0" tIns="0" rIns="0" bIns="0" rtlCol="0" anchor="ctr"/>
           <a:lstStyle/>
           <a:p>
-            <a:pPr algn="ctr" indent="0" marL="0">
+            <a:pPr marL="0" indent="0" algn="ctr">
               <a:buNone/>
             </a:pPr>
             <a:r>
@@ -4838,7 +4843,7 @@
           <a:bodyPr wrap="square" lIns="0" tIns="0" rIns="0" bIns="0" rtlCol="0" anchor="ctr"/>
           <a:lstStyle/>
           <a:p>
-            <a:pPr algn="ctr" indent="0" marL="0">
+            <a:pPr marL="0" indent="0" algn="ctr">
               <a:buNone/>
             </a:pPr>
             <a:r>
@@ -4877,7 +4882,7 @@
           <a:bodyPr wrap="square" lIns="0" tIns="0" rIns="0" bIns="0" rtlCol="0" anchor="ctr"/>
           <a:lstStyle/>
           <a:p>
-            <a:pPr algn="ctr" indent="0" marL="0">
+            <a:pPr marL="0" indent="0" algn="ctr">
               <a:lnSpc>
                 <a:spcPts val="1500"/>
               </a:lnSpc>
@@ -4897,7 +4902,7 @@
             <a:endParaRPr lang="en-US" sz="1050" dirty="0"/>
           </a:p>
           <a:p>
-            <a:pPr algn="ctr" indent="0" marL="0">
+            <a:pPr marL="0" indent="0" algn="ctr">
               <a:lnSpc>
                 <a:spcPts val="1500"/>
               </a:lnSpc>
@@ -4939,7 +4944,7 @@
           <a:bodyPr wrap="square" lIns="0" tIns="0" rIns="0" bIns="0" rtlCol="0" anchor="ctr"/>
           <a:lstStyle/>
           <a:p>
-            <a:pPr algn="ctr" indent="0" marL="0">
+            <a:pPr marL="0" indent="0" algn="ctr">
               <a:buNone/>
             </a:pPr>
             <a:r>
@@ -4980,13 +4985,20 @@
             <a:prstDash val="solid"/>
           </a:ln>
           <a:effectLst>
-            <a:outerShdw sx="100000" sy="100000" kx="0" ky="0" algn="bl" rotWithShape="0" blurRad="127000" dist="38100" dir="5400000">
+            <a:outerShdw blurRad="127000" dist="38100" dir="5400000" algn="bl" rotWithShape="0">
               <a:srgbClr val="000000">
                 <a:alpha val="28000"/>
               </a:srgbClr>
             </a:outerShdw>
           </a:effectLst>
         </p:spPr>
+        <p:txBody>
+          <a:bodyPr/>
+          <a:lstStyle/>
+          <a:p>
+            <a:endParaRPr lang="zh-TW" altLang="en-US"/>
+          </a:p>
+        </p:txBody>
       </p:sp>
       <p:sp>
         <p:nvSpPr>
@@ -5009,7 +5021,7 @@
           <a:bodyPr wrap="square" lIns="0" tIns="0" rIns="0" bIns="0" rtlCol="0" anchor="ctr"/>
           <a:lstStyle/>
           <a:p>
-            <a:pPr algn="ctr" indent="0" marL="0">
+            <a:pPr marL="0" indent="0" algn="ctr">
               <a:buNone/>
             </a:pPr>
             <a:r>
@@ -5045,7 +5057,7 @@
           <a:bodyPr wrap="square" lIns="0" tIns="0" rIns="0" bIns="0" rtlCol="0" anchor="ctr"/>
           <a:lstStyle/>
           <a:p>
-            <a:pPr algn="ctr" indent="0" marL="0">
+            <a:pPr marL="0" indent="0" algn="ctr">
               <a:buNone/>
             </a:pPr>
             <a:r>
@@ -5084,7 +5096,7 @@
           <a:bodyPr wrap="square" lIns="0" tIns="0" rIns="0" bIns="0" rtlCol="0" anchor="ctr"/>
           <a:lstStyle/>
           <a:p>
-            <a:pPr algn="ctr" indent="0" marL="0">
+            <a:pPr marL="0" indent="0" algn="ctr">
               <a:lnSpc>
                 <a:spcPts val="1500"/>
               </a:lnSpc>
@@ -5104,7 +5116,7 @@
             <a:endParaRPr lang="en-US" sz="1050" dirty="0"/>
           </a:p>
           <a:p>
-            <a:pPr algn="ctr" indent="0" marL="0">
+            <a:pPr marL="0" indent="0" algn="ctr">
               <a:lnSpc>
                 <a:spcPts val="1500"/>
               </a:lnSpc>
@@ -5151,6 +5163,13 @@
             <a:prstDash val="solid"/>
           </a:ln>
         </p:spPr>
+        <p:txBody>
+          <a:bodyPr/>
+          <a:lstStyle/>
+          <a:p>
+            <a:endParaRPr lang="zh-TW" altLang="en-US"/>
+          </a:p>
+        </p:txBody>
       </p:sp>
       <p:sp>
         <p:nvSpPr>
@@ -5173,7 +5192,7 @@
           <a:bodyPr wrap="square" lIns="0" tIns="0" rIns="0" bIns="0" rtlCol="0" anchor="ctr"/>
           <a:lstStyle/>
           <a:p>
-            <a:pPr algn="ctr" indent="0" marL="0">
+            <a:pPr marL="0" indent="0" algn="ctr">
               <a:buNone/>
             </a:pPr>
             <a:r>
@@ -5207,6 +5226,7 @@
         <a:solidFill>
           <a:srgbClr val="FAF5EC"/>
         </a:solidFill>
+        <a:effectLst/>
       </p:bgPr>
     </p:bg>
     <p:spTree>
@@ -5244,11 +5264,11 @@
           <a:bodyPr wrap="square" lIns="0" tIns="0" rIns="0" bIns="0" rtlCol="0" anchor="ctr"/>
           <a:lstStyle/>
           <a:p>
-            <a:pPr indent="0" marL="0">
-              <a:buNone/>
-            </a:pPr>
-            <a:r>
-              <a:rPr lang="en-US" sz="1100" b="1" spc="400" kern="0" dirty="0">
+            <a:pPr marL="0" indent="0">
+              <a:buNone/>
+            </a:pPr>
+            <a:r>
+              <a:rPr lang="en-US" sz="1100" b="1" kern="0" spc="400" dirty="0">
                 <a:solidFill>
                   <a:srgbClr val="C95E36"/>
                 </a:solidFill>
@@ -5283,7 +5303,7 @@
           <a:bodyPr wrap="square" lIns="0" tIns="0" rIns="0" bIns="0" rtlCol="0" anchor="ctr"/>
           <a:lstStyle/>
           <a:p>
-            <a:pPr indent="0" marL="0">
+            <a:pPr marL="0" indent="0">
               <a:buNone/>
             </a:pPr>
             <a:r>
@@ -5327,13 +5347,20 @@
             <a:prstDash val="solid"/>
           </a:ln>
           <a:effectLst>
-            <a:outerShdw sx="100000" sy="100000" kx="0" ky="0" algn="bl" rotWithShape="0" blurRad="101600" dist="25400" dir="5400000">
+            <a:outerShdw blurRad="101600" dist="25400" dir="5400000" algn="bl" rotWithShape="0">
               <a:srgbClr val="000000">
                 <a:alpha val="7000"/>
               </a:srgbClr>
             </a:outerShdw>
           </a:effectLst>
         </p:spPr>
+        <p:txBody>
+          <a:bodyPr/>
+          <a:lstStyle/>
+          <a:p>
+            <a:endParaRPr lang="zh-TW" altLang="en-US"/>
+          </a:p>
+        </p:txBody>
       </p:sp>
       <p:sp>
         <p:nvSpPr>
@@ -5359,6 +5386,13 @@
             <a:prstDash val="solid"/>
           </a:ln>
         </p:spPr>
+        <p:txBody>
+          <a:bodyPr/>
+          <a:lstStyle/>
+          <a:p>
+            <a:endParaRPr lang="zh-TW" altLang="en-US"/>
+          </a:p>
+        </p:txBody>
       </p:sp>
       <p:sp>
         <p:nvSpPr>
@@ -5381,7 +5415,7 @@
           <a:bodyPr wrap="square" lIns="0" tIns="0" rIns="0" bIns="0" rtlCol="0" anchor="ctr"/>
           <a:lstStyle/>
           <a:p>
-            <a:pPr indent="0" marL="0">
+            <a:pPr marL="0" indent="0">
               <a:buNone/>
             </a:pPr>
             <a:r>
@@ -5395,9 +5429,6 @@
               </a:rPr>
               <a:t>👵 陳美玲　</a:t>
             </a:r>
-            <a:pPr indent="0" marL="0">
-              <a:buNone/>
-            </a:pPr>
             <a:r>
               <a:rPr lang="en-US" sz="1100" b="1" dirty="0">
                 <a:solidFill>
@@ -5434,7 +5465,7 @@
           <a:bodyPr wrap="square" lIns="0" tIns="0" rIns="0" bIns="0" rtlCol="0" anchor="ctr"/>
           <a:lstStyle/>
           <a:p>
-            <a:pPr indent="0" marL="0">
+            <a:pPr marL="0" indent="0">
               <a:buNone/>
             </a:pPr>
             <a:r>
@@ -5448,9 +5479,6 @@
               </a:rPr>
               <a:t>🍽️  </a:t>
             </a:r>
-            <a:pPr indent="0" marL="0">
-              <a:buNone/>
-            </a:pPr>
             <a:r>
               <a:rPr lang="en-US" sz="1150" dirty="0">
                 <a:solidFill>
@@ -5462,9 +5490,6 @@
               </a:rPr>
               <a:t>飲食　</a:t>
             </a:r>
-            <a:pPr indent="0" marL="0">
-              <a:buNone/>
-            </a:pPr>
             <a:r>
               <a:rPr lang="en-US" sz="1200" b="1" dirty="0">
                 <a:solidFill>
@@ -5502,6 +5527,13 @@
             <a:prstDash val="solid"/>
           </a:ln>
         </p:spPr>
+        <p:txBody>
+          <a:bodyPr/>
+          <a:lstStyle/>
+          <a:p>
+            <a:endParaRPr lang="zh-TW" altLang="en-US"/>
+          </a:p>
+        </p:txBody>
       </p:sp>
       <p:sp>
         <p:nvSpPr>
@@ -5524,7 +5556,7 @@
           <a:bodyPr wrap="square" lIns="0" tIns="0" rIns="0" bIns="0" rtlCol="0" anchor="ctr"/>
           <a:lstStyle/>
           <a:p>
-            <a:pPr indent="0" marL="0">
+            <a:pPr marL="0" indent="0">
               <a:buNone/>
             </a:pPr>
             <a:r>
@@ -5538,9 +5570,6 @@
               </a:rPr>
               <a:t>💊  </a:t>
             </a:r>
-            <a:pPr indent="0" marL="0">
-              <a:buNone/>
-            </a:pPr>
             <a:r>
               <a:rPr lang="en-US" sz="1150" dirty="0">
                 <a:solidFill>
@@ -5552,9 +5581,6 @@
               </a:rPr>
               <a:t>用藥　</a:t>
             </a:r>
-            <a:pPr indent="0" marL="0">
-              <a:buNone/>
-            </a:pPr>
             <a:r>
               <a:rPr lang="en-US" sz="1200" b="1" dirty="0">
                 <a:solidFill>
@@ -5592,6 +5618,13 @@
             <a:prstDash val="solid"/>
           </a:ln>
         </p:spPr>
+        <p:txBody>
+          <a:bodyPr/>
+          <a:lstStyle/>
+          <a:p>
+            <a:endParaRPr lang="zh-TW" altLang="en-US"/>
+          </a:p>
+        </p:txBody>
       </p:sp>
       <p:sp>
         <p:nvSpPr>
@@ -5614,7 +5647,7 @@
           <a:bodyPr wrap="square" lIns="0" tIns="0" rIns="0" bIns="0" rtlCol="0" anchor="ctr"/>
           <a:lstStyle/>
           <a:p>
-            <a:pPr indent="0" marL="0">
+            <a:pPr marL="0" indent="0">
               <a:buNone/>
             </a:pPr>
             <a:r>
@@ -5628,9 +5661,6 @@
               </a:rPr>
               <a:t>🩺  </a:t>
             </a:r>
-            <a:pPr indent="0" marL="0">
-              <a:buNone/>
-            </a:pPr>
             <a:r>
               <a:rPr lang="en-US" sz="1150" dirty="0">
                 <a:solidFill>
@@ -5642,9 +5672,6 @@
               </a:rPr>
               <a:t>血壓　</a:t>
             </a:r>
-            <a:pPr indent="0" marL="0">
-              <a:buNone/>
-            </a:pPr>
             <a:r>
               <a:rPr lang="en-US" sz="1200" b="1" dirty="0">
                 <a:solidFill>
@@ -5682,6 +5709,13 @@
             <a:prstDash val="solid"/>
           </a:ln>
         </p:spPr>
+        <p:txBody>
+          <a:bodyPr/>
+          <a:lstStyle/>
+          <a:p>
+            <a:endParaRPr lang="zh-TW" altLang="en-US"/>
+          </a:p>
+        </p:txBody>
       </p:sp>
       <p:sp>
         <p:nvSpPr>
@@ -5704,7 +5738,7 @@
           <a:bodyPr wrap="square" lIns="0" tIns="0" rIns="0" bIns="0" rtlCol="0" anchor="ctr"/>
           <a:lstStyle/>
           <a:p>
-            <a:pPr indent="0" marL="0">
+            <a:pPr marL="0" indent="0">
               <a:buNone/>
             </a:pPr>
             <a:r>
@@ -5718,9 +5752,6 @@
               </a:rPr>
               <a:t>🏠  </a:t>
             </a:r>
-            <a:pPr indent="0" marL="0">
-              <a:buNone/>
-            </a:pPr>
             <a:r>
               <a:rPr lang="en-US" sz="1150" dirty="0">
                 <a:solidFill>
@@ -5732,9 +5763,6 @@
               </a:rPr>
               <a:t>居家　</a:t>
             </a:r>
-            <a:pPr indent="0" marL="0">
-              <a:buNone/>
-            </a:pPr>
             <a:r>
               <a:rPr lang="en-US" sz="1200" b="1" dirty="0">
                 <a:solidFill>
@@ -5772,6 +5800,13 @@
             <a:prstDash val="solid"/>
           </a:ln>
         </p:spPr>
+        <p:txBody>
+          <a:bodyPr/>
+          <a:lstStyle/>
+          <a:p>
+            <a:endParaRPr lang="zh-TW" altLang="en-US"/>
+          </a:p>
+        </p:txBody>
       </p:sp>
       <p:sp>
         <p:nvSpPr>
@@ -5794,7 +5829,7 @@
           <a:bodyPr wrap="square" lIns="0" tIns="0" rIns="0" bIns="0" rtlCol="0" anchor="ctr"/>
           <a:lstStyle/>
           <a:p>
-            <a:pPr indent="0" marL="0">
+            <a:pPr marL="0" indent="0">
               <a:buNone/>
             </a:pPr>
             <a:r>
@@ -5808,9 +5843,6 @@
               </a:rPr>
               <a:t>🧭  </a:t>
             </a:r>
-            <a:pPr indent="0" marL="0">
-              <a:buNone/>
-            </a:pPr>
             <a:r>
               <a:rPr lang="en-US" sz="1150" dirty="0">
                 <a:solidFill>
@@ -5822,9 +5854,6 @@
               </a:rPr>
               <a:t>幸福指數　</a:t>
             </a:r>
-            <a:pPr indent="0" marL="0">
-              <a:buNone/>
-            </a:pPr>
             <a:r>
               <a:rPr lang="en-US" sz="1200" b="1" dirty="0">
                 <a:solidFill>
@@ -5864,6 +5893,13 @@
             <a:prstDash val="solid"/>
           </a:ln>
         </p:spPr>
+        <p:txBody>
+          <a:bodyPr/>
+          <a:lstStyle/>
+          <a:p>
+            <a:endParaRPr lang="zh-TW" altLang="en-US"/>
+          </a:p>
+        </p:txBody>
       </p:sp>
       <p:sp>
         <p:nvSpPr>
@@ -5886,7 +5922,7 @@
           <a:bodyPr wrap="square" lIns="0" tIns="0" rIns="0" bIns="0" rtlCol="0" anchor="ctr"/>
           <a:lstStyle/>
           <a:p>
-            <a:pPr algn="ctr" indent="0" marL="0">
+            <a:pPr marL="0" indent="0" algn="ctr">
               <a:buNone/>
             </a:pPr>
             <a:r>
@@ -5925,7 +5961,7 @@
           <a:bodyPr wrap="square" lIns="0" tIns="0" rIns="0" bIns="0" rtlCol="0" anchor="ctr"/>
           <a:lstStyle/>
           <a:p>
-            <a:pPr indent="0" marL="0">
+            <a:pPr marL="0" indent="0">
               <a:buNone/>
             </a:pPr>
             <a:r>
@@ -5964,7 +6000,7 @@
           <a:bodyPr wrap="square" lIns="0" tIns="0" rIns="0" bIns="0" rtlCol="0" anchor="ctr"/>
           <a:lstStyle/>
           <a:p>
-            <a:pPr indent="0" marL="0">
+            <a:pPr marL="0" indent="0">
               <a:lnSpc>
                 <a:spcPts val="1600"/>
               </a:lnSpc>
@@ -6009,6 +6045,13 @@
             <a:prstDash val="solid"/>
           </a:ln>
         </p:spPr>
+        <p:txBody>
+          <a:bodyPr/>
+          <a:lstStyle/>
+          <a:p>
+            <a:endParaRPr lang="zh-TW" altLang="en-US"/>
+          </a:p>
+        </p:txBody>
       </p:sp>
       <p:sp>
         <p:nvSpPr>
@@ -6031,7 +6074,7 @@
           <a:bodyPr wrap="square" lIns="0" tIns="0" rIns="0" bIns="0" rtlCol="0" anchor="ctr"/>
           <a:lstStyle/>
           <a:p>
-            <a:pPr algn="ctr" indent="0" marL="0">
+            <a:pPr marL="0" indent="0" algn="ctr">
               <a:buNone/>
             </a:pPr>
             <a:r>
@@ -6070,7 +6113,7 @@
           <a:bodyPr wrap="square" lIns="0" tIns="0" rIns="0" bIns="0" rtlCol="0" anchor="ctr"/>
           <a:lstStyle/>
           <a:p>
-            <a:pPr indent="0" marL="0">
+            <a:pPr marL="0" indent="0">
               <a:buNone/>
             </a:pPr>
             <a:r>
@@ -6109,7 +6152,7 @@
           <a:bodyPr wrap="square" lIns="0" tIns="0" rIns="0" bIns="0" rtlCol="0" anchor="ctr"/>
           <a:lstStyle/>
           <a:p>
-            <a:pPr indent="0" marL="0">
+            <a:pPr marL="0" indent="0">
               <a:lnSpc>
                 <a:spcPts val="1600"/>
               </a:lnSpc>
@@ -6154,6 +6197,13 @@
             <a:prstDash val="solid"/>
           </a:ln>
         </p:spPr>
+        <p:txBody>
+          <a:bodyPr/>
+          <a:lstStyle/>
+          <a:p>
+            <a:endParaRPr lang="zh-TW" altLang="en-US"/>
+          </a:p>
+        </p:txBody>
       </p:sp>
       <p:sp>
         <p:nvSpPr>
@@ -6176,7 +6226,7 @@
           <a:bodyPr wrap="square" lIns="0" tIns="0" rIns="0" bIns="0" rtlCol="0" anchor="ctr"/>
           <a:lstStyle/>
           <a:p>
-            <a:pPr algn="ctr" indent="0" marL="0">
+            <a:pPr marL="0" indent="0" algn="ctr">
               <a:buNone/>
             </a:pPr>
             <a:r>
@@ -6215,7 +6265,7 @@
           <a:bodyPr wrap="square" lIns="0" tIns="0" rIns="0" bIns="0" rtlCol="0" anchor="ctr"/>
           <a:lstStyle/>
           <a:p>
-            <a:pPr indent="0" marL="0">
+            <a:pPr marL="0" indent="0">
               <a:buNone/>
             </a:pPr>
             <a:r>
@@ -6254,7 +6304,7 @@
           <a:bodyPr wrap="square" lIns="0" tIns="0" rIns="0" bIns="0" rtlCol="0" anchor="ctr"/>
           <a:lstStyle/>
           <a:p>
-            <a:pPr indent="0" marL="0">
+            <a:pPr marL="0" indent="0">
               <a:lnSpc>
                 <a:spcPts val="1600"/>
               </a:lnSpc>
@@ -6296,7 +6346,7 @@
           <a:bodyPr wrap="square" lIns="0" tIns="0" rIns="0" bIns="0" rtlCol="0" anchor="ctr"/>
           <a:lstStyle/>
           <a:p>
-            <a:pPr indent="0" marL="0">
+            <a:pPr marL="0" indent="0">
               <a:buNone/>
             </a:pPr>
             <a:r>
@@ -6335,7 +6385,7 @@
           <a:bodyPr wrap="square" lIns="0" tIns="0" rIns="0" bIns="0" rtlCol="0" anchor="ctr"/>
           <a:lstStyle/>
           <a:p>
-            <a:pPr algn="r" indent="0" marL="0">
+            <a:pPr marL="0" indent="0" algn="r">
               <a:buNone/>
             </a:pPr>
             <a:r>
@@ -6369,6 +6419,7 @@
         <a:solidFill>
           <a:srgbClr val="FAF5EC"/>
         </a:solidFill>
+        <a:effectLst/>
       </p:bgPr>
     </p:bg>
     <p:spTree>
@@ -6408,6 +6459,13 @@
             <a:prstDash val="solid"/>
           </a:ln>
         </p:spPr>
+        <p:txBody>
+          <a:bodyPr/>
+          <a:lstStyle/>
+          <a:p>
+            <a:endParaRPr lang="zh-TW" altLang="en-US"/>
+          </a:p>
+        </p:txBody>
       </p:sp>
       <p:sp>
         <p:nvSpPr>
@@ -6432,6 +6490,13 @@
             <a:prstDash val="solid"/>
           </a:ln>
         </p:spPr>
+        <p:txBody>
+          <a:bodyPr/>
+          <a:lstStyle/>
+          <a:p>
+            <a:endParaRPr lang="zh-TW" altLang="en-US"/>
+          </a:p>
+        </p:txBody>
       </p:sp>
       <p:sp>
         <p:nvSpPr>
@@ -6456,6 +6521,13 @@
             <a:prstDash val="solid"/>
           </a:ln>
         </p:spPr>
+        <p:txBody>
+          <a:bodyPr/>
+          <a:lstStyle/>
+          <a:p>
+            <a:endParaRPr lang="zh-TW" altLang="en-US"/>
+          </a:p>
+        </p:txBody>
       </p:sp>
       <p:sp>
         <p:nvSpPr>
@@ -6480,6 +6552,13 @@
             <a:prstDash val="solid"/>
           </a:ln>
         </p:spPr>
+        <p:txBody>
+          <a:bodyPr/>
+          <a:lstStyle/>
+          <a:p>
+            <a:endParaRPr lang="zh-TW" altLang="en-US"/>
+          </a:p>
+        </p:txBody>
       </p:sp>
       <p:sp>
         <p:nvSpPr>
@@ -6502,11 +6581,11 @@
           <a:bodyPr wrap="square" lIns="0" tIns="0" rIns="0" bIns="0" rtlCol="0" anchor="ctr"/>
           <a:lstStyle/>
           <a:p>
-            <a:pPr indent="0" marL="0">
-              <a:buNone/>
-            </a:pPr>
-            <a:r>
-              <a:rPr lang="en-US" sz="1100" b="1" spc="400" kern="0" dirty="0">
+            <a:pPr marL="0" indent="0">
+              <a:buNone/>
+            </a:pPr>
+            <a:r>
+              <a:rPr lang="en-US" sz="1100" b="1" kern="0" spc="400" dirty="0">
                 <a:solidFill>
                   <a:srgbClr val="C95E36"/>
                 </a:solidFill>
@@ -6541,7 +6620,7 @@
           <a:bodyPr wrap="square" lIns="0" tIns="0" rIns="0" bIns="0" rtlCol="0" anchor="ctr"/>
           <a:lstStyle/>
           <a:p>
-            <a:pPr indent="0" marL="0">
+            <a:pPr marL="0" indent="0">
               <a:buNone/>
             </a:pPr>
             <a:r>
@@ -6585,13 +6664,20 @@
             <a:prstDash val="solid"/>
           </a:ln>
           <a:effectLst>
-            <a:outerShdw sx="100000" sy="100000" kx="0" ky="0" algn="bl" rotWithShape="0" blurRad="101600" dist="25400" dir="5400000">
+            <a:outerShdw blurRad="101600" dist="25400" dir="5400000" algn="bl" rotWithShape="0">
               <a:srgbClr val="000000">
                 <a:alpha val="6000"/>
               </a:srgbClr>
             </a:outerShdw>
           </a:effectLst>
         </p:spPr>
+        <p:txBody>
+          <a:bodyPr/>
+          <a:lstStyle/>
+          <a:p>
+            <a:endParaRPr lang="zh-TW" altLang="en-US"/>
+          </a:p>
+        </p:txBody>
       </p:sp>
       <p:sp>
         <p:nvSpPr>
@@ -6617,6 +6703,13 @@
             <a:prstDash val="solid"/>
           </a:ln>
         </p:spPr>
+        <p:txBody>
+          <a:bodyPr/>
+          <a:lstStyle/>
+          <a:p>
+            <a:endParaRPr lang="zh-TW" altLang="en-US"/>
+          </a:p>
+        </p:txBody>
       </p:sp>
       <p:sp>
         <p:nvSpPr>
@@ -6639,7 +6732,7 @@
           <a:bodyPr wrap="square" lIns="0" tIns="0" rIns="0" bIns="0" rtlCol="0" anchor="ctr"/>
           <a:lstStyle/>
           <a:p>
-            <a:pPr algn="ctr" indent="0" marL="0">
+            <a:pPr marL="0" indent="0" algn="ctr">
               <a:buNone/>
             </a:pPr>
             <a:r>
@@ -6678,7 +6771,7 @@
           <a:bodyPr wrap="square" lIns="0" tIns="0" rIns="0" bIns="0" rtlCol="0" anchor="ctr"/>
           <a:lstStyle/>
           <a:p>
-            <a:pPr algn="ctr" indent="0" marL="0">
+            <a:pPr marL="0" indent="0" algn="ctr">
               <a:buNone/>
             </a:pPr>
             <a:r>
@@ -6714,7 +6807,7 @@
           <a:bodyPr wrap="square" lIns="0" tIns="0" rIns="0" bIns="0" rtlCol="0" anchor="ctr"/>
           <a:lstStyle/>
           <a:p>
-            <a:pPr algn="ctr" indent="0" marL="0">
+            <a:pPr marL="0" indent="0" algn="ctr">
               <a:buNone/>
             </a:pPr>
             <a:r>
@@ -6753,7 +6846,7 @@
           <a:bodyPr wrap="square" lIns="0" tIns="0" rIns="0" bIns="0" rtlCol="0" anchor="ctr"/>
           <a:lstStyle/>
           <a:p>
-            <a:pPr algn="ctr" indent="0" marL="0">
+            <a:pPr marL="0" indent="0" algn="ctr">
               <a:lnSpc>
                 <a:spcPts val="1700"/>
               </a:lnSpc>
@@ -6773,7 +6866,7 @@
             <a:endParaRPr lang="en-US" sz="1200" dirty="0"/>
           </a:p>
           <a:p>
-            <a:pPr algn="ctr" indent="0" marL="0">
+            <a:pPr marL="0" indent="0" algn="ctr">
               <a:lnSpc>
                 <a:spcPts val="1700"/>
               </a:lnSpc>
@@ -6815,7 +6908,7 @@
           <a:bodyPr wrap="square" lIns="0" tIns="0" rIns="0" bIns="0" rtlCol="0" anchor="ctr"/>
           <a:lstStyle/>
           <a:p>
-            <a:pPr algn="ctr" indent="0" marL="0">
+            <a:pPr marL="0" indent="0" algn="ctr">
               <a:buNone/>
             </a:pPr>
             <a:r>
@@ -6856,13 +6949,20 @@
             <a:prstDash val="solid"/>
           </a:ln>
           <a:effectLst>
-            <a:outerShdw sx="100000" sy="100000" kx="0" ky="0" algn="bl" rotWithShape="0" blurRad="101600" dist="25400" dir="5400000">
+            <a:outerShdw blurRad="101600" dist="25400" dir="5400000" algn="bl" rotWithShape="0">
               <a:srgbClr val="000000">
                 <a:alpha val="6000"/>
               </a:srgbClr>
             </a:outerShdw>
           </a:effectLst>
         </p:spPr>
+        <p:txBody>
+          <a:bodyPr/>
+          <a:lstStyle/>
+          <a:p>
+            <a:endParaRPr lang="zh-TW" altLang="en-US"/>
+          </a:p>
+        </p:txBody>
       </p:sp>
       <p:sp>
         <p:nvSpPr>
@@ -6888,6 +6988,13 @@
             <a:prstDash val="solid"/>
           </a:ln>
         </p:spPr>
+        <p:txBody>
+          <a:bodyPr/>
+          <a:lstStyle/>
+          <a:p>
+            <a:endParaRPr lang="zh-TW" altLang="en-US"/>
+          </a:p>
+        </p:txBody>
       </p:sp>
       <p:sp>
         <p:nvSpPr>
@@ -6910,7 +7017,7 @@
           <a:bodyPr wrap="square" lIns="0" tIns="0" rIns="0" bIns="0" rtlCol="0" anchor="ctr"/>
           <a:lstStyle/>
           <a:p>
-            <a:pPr algn="ctr" indent="0" marL="0">
+            <a:pPr marL="0" indent="0" algn="ctr">
               <a:buNone/>
             </a:pPr>
             <a:r>
@@ -6949,7 +7056,7 @@
           <a:bodyPr wrap="square" lIns="0" tIns="0" rIns="0" bIns="0" rtlCol="0" anchor="ctr"/>
           <a:lstStyle/>
           <a:p>
-            <a:pPr algn="ctr" indent="0" marL="0">
+            <a:pPr marL="0" indent="0" algn="ctr">
               <a:buNone/>
             </a:pPr>
             <a:r>
@@ -6985,7 +7092,7 @@
           <a:bodyPr wrap="square" lIns="0" tIns="0" rIns="0" bIns="0" rtlCol="0" anchor="ctr"/>
           <a:lstStyle/>
           <a:p>
-            <a:pPr algn="ctr" indent="0" marL="0">
+            <a:pPr marL="0" indent="0" algn="ctr">
               <a:buNone/>
             </a:pPr>
             <a:r>
@@ -7024,7 +7131,7 @@
           <a:bodyPr wrap="square" lIns="0" tIns="0" rIns="0" bIns="0" rtlCol="0" anchor="ctr"/>
           <a:lstStyle/>
           <a:p>
-            <a:pPr algn="ctr" indent="0" marL="0">
+            <a:pPr marL="0" indent="0" algn="ctr">
               <a:lnSpc>
                 <a:spcPts val="1700"/>
               </a:lnSpc>
@@ -7044,7 +7151,7 @@
             <a:endParaRPr lang="en-US" sz="1200" dirty="0"/>
           </a:p>
           <a:p>
-            <a:pPr algn="ctr" indent="0" marL="0">
+            <a:pPr marL="0" indent="0" algn="ctr">
               <a:lnSpc>
                 <a:spcPts val="1700"/>
               </a:lnSpc>
@@ -7086,7 +7193,7 @@
           <a:bodyPr wrap="square" lIns="0" tIns="0" rIns="0" bIns="0" rtlCol="0" anchor="ctr"/>
           <a:lstStyle/>
           <a:p>
-            <a:pPr algn="ctr" indent="0" marL="0">
+            <a:pPr marL="0" indent="0" algn="ctr">
               <a:buNone/>
             </a:pPr>
             <a:r>
@@ -7127,13 +7234,20 @@
             <a:prstDash val="solid"/>
           </a:ln>
           <a:effectLst>
-            <a:outerShdw sx="100000" sy="100000" kx="0" ky="0" algn="bl" rotWithShape="0" blurRad="101600" dist="25400" dir="5400000">
+            <a:outerShdw blurRad="101600" dist="25400" dir="5400000" algn="bl" rotWithShape="0">
               <a:srgbClr val="000000">
                 <a:alpha val="6000"/>
               </a:srgbClr>
             </a:outerShdw>
           </a:effectLst>
         </p:spPr>
+        <p:txBody>
+          <a:bodyPr/>
+          <a:lstStyle/>
+          <a:p>
+            <a:endParaRPr lang="zh-TW" altLang="en-US"/>
+          </a:p>
+        </p:txBody>
       </p:sp>
       <p:sp>
         <p:nvSpPr>
@@ -7159,6 +7273,13 @@
             <a:prstDash val="solid"/>
           </a:ln>
         </p:spPr>
+        <p:txBody>
+          <a:bodyPr/>
+          <a:lstStyle/>
+          <a:p>
+            <a:endParaRPr lang="zh-TW" altLang="en-US"/>
+          </a:p>
+        </p:txBody>
       </p:sp>
       <p:sp>
         <p:nvSpPr>
@@ -7181,7 +7302,7 @@
           <a:bodyPr wrap="square" lIns="0" tIns="0" rIns="0" bIns="0" rtlCol="0" anchor="ctr"/>
           <a:lstStyle/>
           <a:p>
-            <a:pPr algn="ctr" indent="0" marL="0">
+            <a:pPr marL="0" indent="0" algn="ctr">
               <a:buNone/>
             </a:pPr>
             <a:r>
@@ -7220,7 +7341,7 @@
           <a:bodyPr wrap="square" lIns="0" tIns="0" rIns="0" bIns="0" rtlCol="0" anchor="ctr"/>
           <a:lstStyle/>
           <a:p>
-            <a:pPr algn="ctr" indent="0" marL="0">
+            <a:pPr marL="0" indent="0" algn="ctr">
               <a:buNone/>
             </a:pPr>
             <a:r>
@@ -7256,7 +7377,7 @@
           <a:bodyPr wrap="square" lIns="0" tIns="0" rIns="0" bIns="0" rtlCol="0" anchor="ctr"/>
           <a:lstStyle/>
           <a:p>
-            <a:pPr algn="ctr" indent="0" marL="0">
+            <a:pPr marL="0" indent="0" algn="ctr">
               <a:buNone/>
             </a:pPr>
             <a:r>
@@ -7295,7 +7416,7 @@
           <a:bodyPr wrap="square" lIns="0" tIns="0" rIns="0" bIns="0" rtlCol="0" anchor="ctr"/>
           <a:lstStyle/>
           <a:p>
-            <a:pPr algn="ctr" indent="0" marL="0">
+            <a:pPr marL="0" indent="0" algn="ctr">
               <a:lnSpc>
                 <a:spcPts val="1700"/>
               </a:lnSpc>
@@ -7315,7 +7436,7 @@
             <a:endParaRPr lang="en-US" sz="1200" dirty="0"/>
           </a:p>
           <a:p>
-            <a:pPr algn="ctr" indent="0" marL="0">
+            <a:pPr marL="0" indent="0" algn="ctr">
               <a:lnSpc>
                 <a:spcPts val="1700"/>
               </a:lnSpc>
@@ -7357,7 +7478,7 @@
           <a:bodyPr wrap="square" lIns="0" tIns="0" rIns="0" bIns="0" rtlCol="0" anchor="ctr"/>
           <a:lstStyle/>
           <a:p>
-            <a:pPr algn="ctr" indent="0" marL="0">
+            <a:pPr marL="0" indent="0" algn="ctr">
               <a:buNone/>
             </a:pPr>
             <a:r>
@@ -7371,9 +7492,6 @@
               </a:rPr>
               <a:t>💡 子女幫爸媽設定一次，</a:t>
             </a:r>
-            <a:pPr algn="ctr" indent="0" marL="0">
-              <a:buNone/>
-            </a:pPr>
             <a:r>
               <a:rPr lang="en-US" sz="1400" b="1" dirty="0">
                 <a:solidFill>
@@ -7410,7 +7528,7 @@
           <a:bodyPr wrap="square" lIns="0" tIns="0" rIns="0" bIns="0" rtlCol="0" anchor="ctr"/>
           <a:lstStyle/>
           <a:p>
-            <a:pPr algn="ctr" indent="0" marL="0">
+            <a:pPr marL="0" indent="0" algn="ctr">
               <a:buNone/>
             </a:pPr>
             <a:r>
@@ -7444,6 +7562,7 @@
         <a:solidFill>
           <a:srgbClr val="FAF5EC"/>
         </a:solidFill>
+        <a:effectLst/>
       </p:bgPr>
     </p:bg>
     <p:spTree>
@@ -7483,6 +7602,13 @@
             <a:prstDash val="solid"/>
           </a:ln>
         </p:spPr>
+        <p:txBody>
+          <a:bodyPr/>
+          <a:lstStyle/>
+          <a:p>
+            <a:endParaRPr lang="zh-TW" altLang="en-US"/>
+          </a:p>
+        </p:txBody>
       </p:sp>
       <p:sp>
         <p:nvSpPr>
@@ -7507,6 +7633,13 @@
             <a:prstDash val="solid"/>
           </a:ln>
         </p:spPr>
+        <p:txBody>
+          <a:bodyPr/>
+          <a:lstStyle/>
+          <a:p>
+            <a:endParaRPr lang="zh-TW" altLang="en-US"/>
+          </a:p>
+        </p:txBody>
       </p:sp>
       <p:sp>
         <p:nvSpPr>
@@ -7531,6 +7664,13 @@
             <a:prstDash val="solid"/>
           </a:ln>
         </p:spPr>
+        <p:txBody>
+          <a:bodyPr/>
+          <a:lstStyle/>
+          <a:p>
+            <a:endParaRPr lang="zh-TW" altLang="en-US"/>
+          </a:p>
+        </p:txBody>
       </p:sp>
       <p:sp>
         <p:nvSpPr>
@@ -7555,6 +7695,13 @@
             <a:prstDash val="solid"/>
           </a:ln>
         </p:spPr>
+        <p:txBody>
+          <a:bodyPr/>
+          <a:lstStyle/>
+          <a:p>
+            <a:endParaRPr lang="zh-TW" altLang="en-US"/>
+          </a:p>
+        </p:txBody>
       </p:sp>
       <p:sp>
         <p:nvSpPr>
@@ -7579,17 +7726,24 @@
             <a:prstDash val="solid"/>
           </a:ln>
         </p:spPr>
+        <p:txBody>
+          <a:bodyPr/>
+          <a:lstStyle/>
+          <a:p>
+            <a:endParaRPr lang="zh-TW" altLang="en-US"/>
+          </a:p>
+        </p:txBody>
       </p:sp>
       <p:pic>
         <p:nvPicPr>
-          <p:cNvPr id="7" name="Image 0" descr="/Users/hanschung/Desktop/55/public/icon-maskable-512.png">    </p:cNvPr>
+          <p:cNvPr id="7" name="Image 0" descr="/Users/hanschung/Desktop/55/public/icon-maskable-512.png"/>
           <p:cNvPicPr>
             <a:picLocks noChangeAspect="1"/>
           </p:cNvPicPr>
           <p:nvPr/>
         </p:nvPicPr>
         <p:blipFill>
-          <a:blip r:embed="rId1"/>
+          <a:blip r:embed="rId3"/>
           <a:stretch>
             <a:fillRect/>
           </a:stretch>
@@ -7625,11 +7779,11 @@
           <a:bodyPr wrap="square" lIns="0" tIns="0" rIns="0" bIns="0" rtlCol="0" anchor="ctr"/>
           <a:lstStyle/>
           <a:p>
-            <a:pPr algn="ctr" indent="0" marL="0">
-              <a:buNone/>
-            </a:pPr>
-            <a:r>
-              <a:rPr lang="en-US" sz="4000" b="1" spc="600" kern="0" dirty="0">
+            <a:pPr marL="0" indent="0" algn="ctr">
+              <a:buNone/>
+            </a:pPr>
+            <a:r>
+              <a:rPr lang="en-US" sz="4000" b="1" kern="0" spc="600" dirty="0">
                 <a:solidFill>
                   <a:srgbClr val="3D2E20"/>
                 </a:solidFill>
@@ -7664,7 +7818,7 @@
           <a:bodyPr wrap="square" lIns="0" tIns="0" rIns="0" bIns="0" rtlCol="0" anchor="ctr"/>
           <a:lstStyle/>
           <a:p>
-            <a:pPr algn="ctr" indent="0" marL="0">
+            <a:pPr marL="0" indent="0" algn="ctr">
               <a:buNone/>
             </a:pPr>
             <a:r>
@@ -7708,13 +7862,20 @@
             <a:prstDash val="solid"/>
           </a:ln>
           <a:effectLst>
-            <a:outerShdw sx="100000" sy="100000" kx="0" ky="0" algn="bl" rotWithShape="0" blurRad="127000" dist="38100" dir="5400000">
+            <a:outerShdw blurRad="127000" dist="38100" dir="5400000" algn="bl" rotWithShape="0">
               <a:srgbClr val="C95E36">
                 <a:alpha val="30000"/>
               </a:srgbClr>
             </a:outerShdw>
           </a:effectLst>
         </p:spPr>
+        <p:txBody>
+          <a:bodyPr/>
+          <a:lstStyle/>
+          <a:p>
+            <a:endParaRPr lang="zh-TW" altLang="en-US"/>
+          </a:p>
+        </p:txBody>
       </p:sp>
       <p:sp>
         <p:nvSpPr>
@@ -7737,11 +7898,11 @@
           <a:bodyPr wrap="square" lIns="0" tIns="0" rIns="0" bIns="0" rtlCol="0" anchor="ctr"/>
           <a:lstStyle/>
           <a:p>
-            <a:pPr algn="ctr" indent="0" marL="0">
-              <a:buNone/>
-            </a:pPr>
-            <a:r>
-              <a:rPr lang="en-US" sz="2000" b="1" spc="100" kern="0" dirty="0">
+            <a:pPr marL="0" indent="0" algn="ctr">
+              <a:buNone/>
+            </a:pPr>
+            <a:r>
+              <a:rPr lang="en-US" sz="2000" b="1" kern="0" spc="100" dirty="0">
                 <a:solidFill>
                   <a:srgbClr val="FFFFFF"/>
                 </a:solidFill>
@@ -7776,11 +7937,11 @@
           <a:bodyPr wrap="square" lIns="0" tIns="0" rIns="0" bIns="0" rtlCol="0" anchor="ctr"/>
           <a:lstStyle/>
           <a:p>
-            <a:pPr algn="ctr" indent="0" marL="0">
-              <a:buNone/>
-            </a:pPr>
-            <a:r>
-              <a:rPr lang="en-US" sz="1100" dirty="0">
+            <a:pPr marL="0" indent="0" algn="ctr">
+              <a:buNone/>
+            </a:pPr>
+            <a:r>
+              <a:rPr lang="en-US" sz="1100" dirty="0" err="1">
                 <a:solidFill>
                   <a:srgbClr val="A89580"/>
                 </a:solidFill>
@@ -7788,7 +7949,7 @@
                 <a:ea typeface="PingFang TC" pitchFamily="34" charset="-122"/>
                 <a:cs typeface="PingFang TC" pitchFamily="34" charset="-120"/>
               </a:rPr>
-              <a:t>合作洽詢　sunboy1120@gmail.com</a:t>
+              <a:t>合作洽詢</a:t>
             </a:r>
             <a:endParaRPr lang="en-US" sz="1100" dirty="0"/>
           </a:p>
@@ -8095,4 +8256,319 @@
     </a:ext>
   </a:extLst>
 </a:theme>
+</file>
+
+<file path=ppt/theme/theme2.xml><?xml version="1.0" encoding="utf-8"?>
+<a:theme xmlns:a="http://schemas.openxmlformats.org/drawingml/2006/main" name="Office 佈景主題">
+  <a:themeElements>
+    <a:clrScheme name="Office">
+      <a:dk1>
+        <a:sysClr val="windowText" lastClr="000000"/>
+      </a:dk1>
+      <a:lt1>
+        <a:sysClr val="window" lastClr="FFFFFF"/>
+      </a:lt1>
+      <a:dk2>
+        <a:srgbClr val="0E2841"/>
+      </a:dk2>
+      <a:lt2>
+        <a:srgbClr val="E8E8E8"/>
+      </a:lt2>
+      <a:accent1>
+        <a:srgbClr val="156082"/>
+      </a:accent1>
+      <a:accent2>
+        <a:srgbClr val="E97132"/>
+      </a:accent2>
+      <a:accent3>
+        <a:srgbClr val="196B24"/>
+      </a:accent3>
+      <a:accent4>
+        <a:srgbClr val="0F9ED5"/>
+      </a:accent4>
+      <a:accent5>
+        <a:srgbClr val="A02B93"/>
+      </a:accent5>
+      <a:accent6>
+        <a:srgbClr val="4EA72E"/>
+      </a:accent6>
+      <a:hlink>
+        <a:srgbClr val="467886"/>
+      </a:hlink>
+      <a:folHlink>
+        <a:srgbClr val="96607D"/>
+      </a:folHlink>
+    </a:clrScheme>
+    <a:fontScheme name="Office">
+      <a:majorFont>
+        <a:latin typeface="Aptos Display" panose="02110004020202020204"/>
+        <a:ea typeface=""/>
+        <a:cs typeface=""/>
+        <a:font script="Jpan" typeface="游ゴシック Light"/>
+        <a:font script="Hang" typeface="맑은 고딕"/>
+        <a:font script="Hans" typeface="等线 Light"/>
+        <a:font script="Hant" typeface="新細明體"/>
+        <a:font script="Arab" typeface="Times New Roman"/>
+        <a:font script="Hebr" typeface="Times New Roman"/>
+        <a:font script="Thai" typeface="Angsana New"/>
+        <a:font script="Ethi" typeface="Nyala"/>
+        <a:font script="Beng" typeface="Vrinda"/>
+        <a:font script="Gujr" typeface="Shruti"/>
+        <a:font script="Khmr" typeface="MoolBoran"/>
+        <a:font script="Knda" typeface="Tunga"/>
+        <a:font script="Guru" typeface="Raavi"/>
+        <a:font script="Cans" typeface="Euphemia"/>
+        <a:font script="Cher" typeface="Plantagenet Cherokee"/>
+        <a:font script="Yiii" typeface="Microsoft Yi Baiti"/>
+        <a:font script="Tibt" typeface="Microsoft Himalaya"/>
+        <a:font script="Thaa" typeface="MV Boli"/>
+        <a:font script="Deva" typeface="Mangal"/>
+        <a:font script="Telu" typeface="Gautami"/>
+        <a:font script="Taml" typeface="Latha"/>
+        <a:font script="Syrc" typeface="Estrangelo Edessa"/>
+        <a:font script="Orya" typeface="Kalinga"/>
+        <a:font script="Mlym" typeface="Kartika"/>
+        <a:font script="Laoo" typeface="DokChampa"/>
+        <a:font script="Sinh" typeface="Iskoola Pota"/>
+        <a:font script="Mong" typeface="Mongolian Baiti"/>
+        <a:font script="Viet" typeface="Times New Roman"/>
+        <a:font script="Uigh" typeface="Microsoft Uighur"/>
+        <a:font script="Geor" typeface="Sylfaen"/>
+        <a:font script="Armn" typeface="Arial"/>
+        <a:font script="Bugi" typeface="Leelawadee UI"/>
+        <a:font script="Bopo" typeface="Microsoft JhengHei"/>
+        <a:font script="Java" typeface="Javanese Text"/>
+        <a:font script="Lisu" typeface="Segoe UI"/>
+        <a:font script="Mymr" typeface="Myanmar Text"/>
+        <a:font script="Nkoo" typeface="Ebrima"/>
+        <a:font script="Olck" typeface="Nirmala UI"/>
+        <a:font script="Osma" typeface="Ebrima"/>
+        <a:font script="Phag" typeface="Phagspa"/>
+        <a:font script="Syrn" typeface="Estrangelo Edessa"/>
+        <a:font script="Syrj" typeface="Estrangelo Edessa"/>
+        <a:font script="Syre" typeface="Estrangelo Edessa"/>
+        <a:font script="Sora" typeface="Nirmala UI"/>
+        <a:font script="Tale" typeface="Microsoft Tai Le"/>
+        <a:font script="Talu" typeface="Microsoft New Tai Lue"/>
+        <a:font script="Tfng" typeface="Ebrima"/>
+      </a:majorFont>
+      <a:minorFont>
+        <a:latin typeface="Aptos" panose="02110004020202020204"/>
+        <a:ea typeface=""/>
+        <a:cs typeface=""/>
+        <a:font script="Jpan" typeface="游ゴシック"/>
+        <a:font script="Hang" typeface="맑은 고딕"/>
+        <a:font script="Hans" typeface="等线"/>
+        <a:font script="Hant" typeface="新細明體"/>
+        <a:font script="Arab" typeface="Arial"/>
+        <a:font script="Hebr" typeface="Arial"/>
+        <a:font script="Thai" typeface="Cordia New"/>
+        <a:font script="Ethi" typeface="Nyala"/>
+        <a:font script="Beng" typeface="Vrinda"/>
+        <a:font script="Gujr" typeface="Shruti"/>
+        <a:font script="Khmr" typeface="DaunPenh"/>
+        <a:font script="Knda" typeface="Tunga"/>
+        <a:font script="Guru" typeface="Raavi"/>
+        <a:font script="Cans" typeface="Euphemia"/>
+        <a:font script="Cher" typeface="Plantagenet Cherokee"/>
+        <a:font script="Yiii" typeface="Microsoft Yi Baiti"/>
+        <a:font script="Tibt" typeface="Microsoft Himalaya"/>
+        <a:font script="Thaa" typeface="MV Boli"/>
+        <a:font script="Deva" typeface="Mangal"/>
+        <a:font script="Telu" typeface="Gautami"/>
+        <a:font script="Taml" typeface="Latha"/>
+        <a:font script="Syrc" typeface="Estrangelo Edessa"/>
+        <a:font script="Orya" typeface="Kalinga"/>
+        <a:font script="Mlym" typeface="Kartika"/>
+        <a:font script="Laoo" typeface="DokChampa"/>
+        <a:font script="Sinh" typeface="Iskoola Pota"/>
+        <a:font script="Mong" typeface="Mongolian Baiti"/>
+        <a:font script="Viet" typeface="Arial"/>
+        <a:font script="Uigh" typeface="Microsoft Uighur"/>
+        <a:font script="Geor" typeface="Sylfaen"/>
+        <a:font script="Armn" typeface="Arial"/>
+        <a:font script="Bugi" typeface="Leelawadee UI"/>
+        <a:font script="Bopo" typeface="Microsoft JhengHei"/>
+        <a:font script="Java" typeface="Javanese Text"/>
+        <a:font script="Lisu" typeface="Segoe UI"/>
+        <a:font script="Mymr" typeface="Myanmar Text"/>
+        <a:font script="Nkoo" typeface="Ebrima"/>
+        <a:font script="Olck" typeface="Nirmala UI"/>
+        <a:font script="Osma" typeface="Ebrima"/>
+        <a:font script="Phag" typeface="Phagspa"/>
+        <a:font script="Syrn" typeface="Estrangelo Edessa"/>
+        <a:font script="Syrj" typeface="Estrangelo Edessa"/>
+        <a:font script="Syre" typeface="Estrangelo Edessa"/>
+        <a:font script="Sora" typeface="Nirmala UI"/>
+        <a:font script="Tale" typeface="Microsoft Tai Le"/>
+        <a:font script="Talu" typeface="Microsoft New Tai Lue"/>
+        <a:font script="Tfng" typeface="Ebrima"/>
+      </a:minorFont>
+    </a:fontScheme>
+    <a:fmtScheme name="Office">
+      <a:fillStyleLst>
+        <a:solidFill>
+          <a:schemeClr val="phClr"/>
+        </a:solidFill>
+        <a:gradFill rotWithShape="1">
+          <a:gsLst>
+            <a:gs pos="0">
+              <a:schemeClr val="phClr">
+                <a:lumMod val="110000"/>
+                <a:satMod val="105000"/>
+                <a:tint val="67000"/>
+              </a:schemeClr>
+            </a:gs>
+            <a:gs pos="50000">
+              <a:schemeClr val="phClr">
+                <a:lumMod val="105000"/>
+                <a:satMod val="103000"/>
+                <a:tint val="73000"/>
+              </a:schemeClr>
+            </a:gs>
+            <a:gs pos="100000">
+              <a:schemeClr val="phClr">
+                <a:lumMod val="105000"/>
+                <a:satMod val="109000"/>
+                <a:tint val="81000"/>
+              </a:schemeClr>
+            </a:gs>
+          </a:gsLst>
+          <a:lin ang="5400000" scaled="0"/>
+        </a:gradFill>
+        <a:gradFill rotWithShape="1">
+          <a:gsLst>
+            <a:gs pos="0">
+              <a:schemeClr val="phClr">
+                <a:satMod val="103000"/>
+                <a:lumMod val="102000"/>
+                <a:tint val="94000"/>
+              </a:schemeClr>
+            </a:gs>
+            <a:gs pos="50000">
+              <a:schemeClr val="phClr">
+                <a:satMod val="110000"/>
+                <a:lumMod val="100000"/>
+                <a:shade val="100000"/>
+              </a:schemeClr>
+            </a:gs>
+            <a:gs pos="100000">
+              <a:schemeClr val="phClr">
+                <a:lumMod val="99000"/>
+                <a:satMod val="120000"/>
+                <a:shade val="78000"/>
+              </a:schemeClr>
+            </a:gs>
+          </a:gsLst>
+          <a:lin ang="5400000" scaled="0"/>
+        </a:gradFill>
+      </a:fillStyleLst>
+      <a:lnStyleLst>
+        <a:ln w="12700" cap="flat" cmpd="sng" algn="ctr">
+          <a:solidFill>
+            <a:schemeClr val="phClr"/>
+          </a:solidFill>
+          <a:prstDash val="solid"/>
+          <a:miter lim="800000"/>
+        </a:ln>
+        <a:ln w="19050" cap="flat" cmpd="sng" algn="ctr">
+          <a:solidFill>
+            <a:schemeClr val="phClr"/>
+          </a:solidFill>
+          <a:prstDash val="solid"/>
+          <a:miter lim="800000"/>
+        </a:ln>
+        <a:ln w="25400" cap="flat" cmpd="sng" algn="ctr">
+          <a:solidFill>
+            <a:schemeClr val="phClr"/>
+          </a:solidFill>
+          <a:prstDash val="solid"/>
+          <a:miter lim="800000"/>
+        </a:ln>
+      </a:lnStyleLst>
+      <a:effectStyleLst>
+        <a:effectStyle>
+          <a:effectLst/>
+        </a:effectStyle>
+        <a:effectStyle>
+          <a:effectLst/>
+        </a:effectStyle>
+        <a:effectStyle>
+          <a:effectLst>
+            <a:outerShdw blurRad="57150" dist="19050" dir="5400000" algn="ctr" rotWithShape="0">
+              <a:srgbClr val="000000">
+                <a:alpha val="63000"/>
+              </a:srgbClr>
+            </a:outerShdw>
+          </a:effectLst>
+        </a:effectStyle>
+      </a:effectStyleLst>
+      <a:bgFillStyleLst>
+        <a:solidFill>
+          <a:schemeClr val="phClr"/>
+        </a:solidFill>
+        <a:solidFill>
+          <a:schemeClr val="phClr">
+            <a:tint val="95000"/>
+            <a:satMod val="170000"/>
+          </a:schemeClr>
+        </a:solidFill>
+        <a:gradFill rotWithShape="1">
+          <a:gsLst>
+            <a:gs pos="0">
+              <a:schemeClr val="phClr">
+                <a:tint val="93000"/>
+                <a:satMod val="150000"/>
+                <a:shade val="98000"/>
+                <a:lumMod val="102000"/>
+              </a:schemeClr>
+            </a:gs>
+            <a:gs pos="50000">
+              <a:schemeClr val="phClr">
+                <a:tint val="98000"/>
+                <a:satMod val="130000"/>
+                <a:shade val="90000"/>
+                <a:lumMod val="103000"/>
+              </a:schemeClr>
+            </a:gs>
+            <a:gs pos="100000">
+              <a:schemeClr val="phClr">
+                <a:shade val="63000"/>
+                <a:satMod val="120000"/>
+              </a:schemeClr>
+            </a:gs>
+          </a:gsLst>
+          <a:lin ang="5400000" scaled="0"/>
+        </a:gradFill>
+      </a:bgFillStyleLst>
+    </a:fmtScheme>
+  </a:themeElements>
+  <a:objectDefaults>
+    <a:lnDef>
+      <a:spPr/>
+      <a:bodyPr/>
+      <a:lstStyle/>
+      <a:style>
+        <a:lnRef idx="2">
+          <a:schemeClr val="accent1"/>
+        </a:lnRef>
+        <a:fillRef idx="0">
+          <a:schemeClr val="accent1"/>
+        </a:fillRef>
+        <a:effectRef idx="1">
+          <a:schemeClr val="accent1"/>
+        </a:effectRef>
+        <a:fontRef idx="minor">
+          <a:schemeClr val="tx1"/>
+        </a:fontRef>
+      </a:style>
+    </a:lnDef>
+  </a:objectDefaults>
+  <a:extraClrSchemeLst/>
+  <a:extLst>
+    <a:ext uri="{05A4C25C-085E-4340-85A3-A5531E510DB2}">
+      <thm15:themeFamily xmlns:thm15="http://schemas.microsoft.com/office/thememl/2012/main" name="Office Theme" id="{2E142A2C-CD16-42D6-873A-C26D2A0506FA}" vid="{1BDDFF52-6CD6-40A5-AB3C-68EB2F1E4D0A}"/>
+    </a:ext>
+  </a:extLst>
+</a:theme>
 </file>